--- a/2026-27/S07/MLOps_S07_Monitoring_XAI_ResponsibleAI.pptx
+++ b/2026-27/S07/MLOps_S07_Monitoring_XAI_ResponsibleAI.pptx
@@ -4413,7 +4413,7 @@
                 <a:ea typeface="Calibri" pitchFamily="34" charset="-122"/>
                 <a:cs typeface="Calibri" pitchFamily="34" charset="-120"/>
               </a:rPr>
-              <a:t>Master in Business Analytics and Big Data</a:t>
+              <a:t>Master in Business Analytics and Data Science</a:t>
             </a:r>
             <a:endParaRPr lang="en-US" sz="900" dirty="0"/>
           </a:p>
@@ -4452,7 +4452,7 @@
                 <a:ea typeface="Calibri" pitchFamily="34" charset="-122"/>
                 <a:cs typeface="Calibri" pitchFamily="34" charset="-120"/>
               </a:rPr>
-              <a:t>MLOps · MBABD-PT 2026–27 · Session 7 · Juan Ramírez</a:t>
+              <a:t>MLOps · MBDS-PT2026F · Session 7 · Juan Ramírez</a:t>
             </a:r>
             <a:endParaRPr lang="en-US" sz="800" dirty="0"/>
           </a:p>
@@ -4718,6 +4718,10 @@
             <a:prstDash val="solid"/>
           </a:ln>
         </p:spPr>
+        <p:txBody>
+          <a:bodyPr/>
+          <a:p/>
+        </p:txBody>
       </p:sp>
       <p:sp>
         <p:nvSpPr>
@@ -4784,6 +4788,10 @@
             <a:prstDash val="solid"/>
           </a:ln>
         </p:spPr>
+        <p:txBody>
+          <a:bodyPr/>
+          <a:p/>
+        </p:txBody>
       </p:sp>
       <p:sp>
         <p:nvSpPr>
@@ -4850,6 +4858,10 @@
             <a:prstDash val="solid"/>
           </a:ln>
         </p:spPr>
+        <p:txBody>
+          <a:bodyPr/>
+          <a:p/>
+        </p:txBody>
       </p:sp>
       <p:sp>
         <p:nvSpPr>
@@ -4916,6 +4928,10 @@
             <a:prstDash val="solid"/>
           </a:ln>
         </p:spPr>
+        <p:txBody>
+          <a:bodyPr/>
+          <a:p/>
+        </p:txBody>
       </p:sp>
       <p:sp>
         <p:nvSpPr>
@@ -4982,6 +4998,10 @@
             <a:prstDash val="solid"/>
           </a:ln>
         </p:spPr>
+        <p:txBody>
+          <a:bodyPr/>
+          <a:p/>
+        </p:txBody>
       </p:sp>
       <p:sp>
         <p:nvSpPr>
@@ -5048,6 +5068,10 @@
             <a:prstDash val="solid"/>
           </a:ln>
         </p:spPr>
+        <p:txBody>
+          <a:bodyPr/>
+          <a:p/>
+        </p:txBody>
       </p:sp>
       <p:sp>
         <p:nvSpPr>
@@ -5114,6 +5138,10 @@
             <a:prstDash val="solid"/>
           </a:ln>
         </p:spPr>
+        <p:txBody>
+          <a:bodyPr/>
+          <a:p/>
+        </p:txBody>
       </p:sp>
       <p:sp>
         <p:nvSpPr>
@@ -5180,6 +5208,10 @@
             <a:prstDash val="solid"/>
           </a:ln>
         </p:spPr>
+        <p:txBody>
+          <a:bodyPr/>
+          <a:p/>
+        </p:txBody>
       </p:sp>
       <p:sp>
         <p:nvSpPr>
@@ -5246,6 +5278,10 @@
             <a:prstDash val="solid"/>
           </a:ln>
         </p:spPr>
+        <p:txBody>
+          <a:bodyPr/>
+          <a:p/>
+        </p:txBody>
       </p:sp>
       <p:sp>
         <p:nvSpPr>
@@ -5286,6 +5322,30 @@
           </a:p>
         </p:txBody>
       </p:sp>
+      <p:pic>
+        <p:nvPicPr>
+          <p:cNvPr id="28" name="IE University logo" descr="IE University, School of Science &amp; Technology"/>
+          <p:cNvPicPr>
+            <a:picLocks noChangeAspect="1"/>
+          </p:cNvPicPr>
+          <p:nvPr/>
+        </p:nvPicPr>
+        <p:blipFill>
+          <a:blip r:embed="rId3"/>
+          <a:stretch>
+            <a:fillRect/>
+          </a:stretch>
+        </p:blipFill>
+        <p:spPr>
+          <a:xfrm>
+            <a:off x="8252653" y="109728"/>
+            <a:ext cx="525587" cy="704395"/>
+          </a:xfrm>
+          <a:prstGeom prst="rect">
+            <a:avLst/>
+          </a:prstGeom>
+        </p:spPr>
+      </p:pic>
     </p:spTree>
   </p:cSld>
   <p:clrMapOvr>
@@ -5351,7 +5411,7 @@
                 <a:ea typeface="Calibri" pitchFamily="34" charset="-122"/>
                 <a:cs typeface="Calibri" pitchFamily="34" charset="-120"/>
               </a:rPr>
-              <a:t>Master in Business Analytics and Big Data</a:t>
+              <a:t>Master in Business Analytics and Data Science</a:t>
             </a:r>
             <a:endParaRPr lang="en-US" sz="900" dirty="0"/>
           </a:p>
@@ -5390,7 +5450,7 @@
                 <a:ea typeface="Calibri" pitchFamily="34" charset="-122"/>
                 <a:cs typeface="Calibri" pitchFamily="34" charset="-120"/>
               </a:rPr>
-              <a:t>MLOps · MBABD-PT 2026–27 · Session 7 · Juan Ramírez</a:t>
+              <a:t>MLOps · MBDS-PT2026F · Session 7 · Juan Ramírez</a:t>
             </a:r>
             <a:endParaRPr lang="en-US" sz="800" dirty="0"/>
           </a:p>
@@ -5500,6 +5560,10 @@
             <a:prstDash val="solid"/>
           </a:ln>
         </p:spPr>
+        <p:txBody>
+          <a:bodyPr/>
+          <a:p/>
+        </p:txBody>
       </p:sp>
       <p:sp>
         <p:nvSpPr>
@@ -5525,6 +5589,10 @@
             <a:prstDash val="solid"/>
           </a:ln>
         </p:spPr>
+        <p:txBody>
+          <a:bodyPr/>
+          <a:p/>
+        </p:txBody>
       </p:sp>
       <p:pic>
         <p:nvPicPr>
@@ -5700,6 +5768,10 @@
             <a:prstDash val="solid"/>
           </a:ln>
         </p:spPr>
+        <p:txBody>
+          <a:bodyPr/>
+          <a:p/>
+        </p:txBody>
       </p:sp>
       <p:sp>
         <p:nvSpPr>
@@ -5725,6 +5797,10 @@
             <a:prstDash val="solid"/>
           </a:ln>
         </p:spPr>
+        <p:txBody>
+          <a:bodyPr/>
+          <a:p/>
+        </p:txBody>
       </p:sp>
       <p:pic>
         <p:nvPicPr>
@@ -5900,6 +5976,10 @@
             <a:prstDash val="solid"/>
           </a:ln>
         </p:spPr>
+        <p:txBody>
+          <a:bodyPr/>
+          <a:p/>
+        </p:txBody>
       </p:sp>
       <p:pic>
         <p:nvPicPr>
@@ -5964,6 +6044,30 @@
           </a:p>
         </p:txBody>
       </p:sp>
+      <p:pic>
+        <p:nvPicPr>
+          <p:cNvPr id="20" name="IE University logo" descr="IE University, School of Science &amp; Technology"/>
+          <p:cNvPicPr>
+            <a:picLocks noChangeAspect="1"/>
+          </p:cNvPicPr>
+          <p:nvPr/>
+        </p:nvPicPr>
+        <p:blipFill>
+          <a:blip r:embed="rId6"/>
+          <a:stretch>
+            <a:fillRect/>
+          </a:stretch>
+        </p:blipFill>
+        <p:spPr>
+          <a:xfrm>
+            <a:off x="8013607" y="92634"/>
+            <a:ext cx="764633" cy="262789"/>
+          </a:xfrm>
+          <a:prstGeom prst="rect">
+            <a:avLst/>
+          </a:prstGeom>
+        </p:spPr>
+      </p:pic>
     </p:spTree>
   </p:cSld>
   <p:clrMapOvr>
@@ -6029,7 +6133,7 @@
                 <a:ea typeface="Calibri" pitchFamily="34" charset="-122"/>
                 <a:cs typeface="Calibri" pitchFamily="34" charset="-120"/>
               </a:rPr>
-              <a:t>Master in Business Analytics and Big Data</a:t>
+              <a:t>Master in Business Analytics and Data Science</a:t>
             </a:r>
             <a:endParaRPr lang="en-US" sz="900" dirty="0"/>
           </a:p>
@@ -6068,7 +6172,7 @@
                 <a:ea typeface="Calibri" pitchFamily="34" charset="-122"/>
                 <a:cs typeface="Calibri" pitchFamily="34" charset="-120"/>
               </a:rPr>
-              <a:t>MLOps · MBABD-PT 2026–27 · Session 7 · Juan Ramírez</a:t>
+              <a:t>MLOps · MBDS-PT2026F · Session 7 · Juan Ramírez</a:t>
             </a:r>
             <a:endParaRPr lang="en-US" sz="800" dirty="0"/>
           </a:p>
@@ -6178,6 +6282,10 @@
             <a:prstDash val="solid"/>
           </a:ln>
         </p:spPr>
+        <p:txBody>
+          <a:bodyPr/>
+          <a:p/>
+        </p:txBody>
       </p:sp>
       <p:sp>
         <p:nvSpPr>
@@ -6203,6 +6311,10 @@
             <a:prstDash val="solid"/>
           </a:ln>
         </p:spPr>
+        <p:txBody>
+          <a:bodyPr/>
+          <a:p/>
+        </p:txBody>
       </p:sp>
       <p:pic>
         <p:nvPicPr>
@@ -6378,6 +6490,10 @@
             <a:prstDash val="solid"/>
           </a:ln>
         </p:spPr>
+        <p:txBody>
+          <a:bodyPr/>
+          <a:p/>
+        </p:txBody>
       </p:sp>
       <p:sp>
         <p:nvSpPr>
@@ -6403,6 +6519,10 @@
             <a:prstDash val="solid"/>
           </a:ln>
         </p:spPr>
+        <p:txBody>
+          <a:bodyPr/>
+          <a:p/>
+        </p:txBody>
       </p:sp>
       <p:pic>
         <p:nvPicPr>
@@ -6578,6 +6698,10 @@
             <a:prstDash val="solid"/>
           </a:ln>
         </p:spPr>
+        <p:txBody>
+          <a:bodyPr/>
+          <a:p/>
+        </p:txBody>
       </p:sp>
       <p:pic>
         <p:nvPicPr>
@@ -6642,6 +6766,30 @@
           </a:p>
         </p:txBody>
       </p:sp>
+      <p:pic>
+        <p:nvPicPr>
+          <p:cNvPr id="20" name="IE University logo" descr="IE University, School of Science &amp; Technology"/>
+          <p:cNvPicPr>
+            <a:picLocks noChangeAspect="1"/>
+          </p:cNvPicPr>
+          <p:nvPr/>
+        </p:nvPicPr>
+        <p:blipFill>
+          <a:blip r:embed="rId6"/>
+          <a:stretch>
+            <a:fillRect/>
+          </a:stretch>
+        </p:blipFill>
+        <p:spPr>
+          <a:xfrm>
+            <a:off x="8013607" y="92634"/>
+            <a:ext cx="764633" cy="262789"/>
+          </a:xfrm>
+          <a:prstGeom prst="rect">
+            <a:avLst/>
+          </a:prstGeom>
+        </p:spPr>
+      </p:pic>
     </p:spTree>
   </p:cSld>
   <p:clrMapOvr>
@@ -6707,7 +6855,7 @@
                 <a:ea typeface="Calibri" pitchFamily="34" charset="-122"/>
                 <a:cs typeface="Calibri" pitchFamily="34" charset="-120"/>
               </a:rPr>
-              <a:t>Master in Business Analytics and Big Data</a:t>
+              <a:t>Master in Business Analytics and Data Science</a:t>
             </a:r>
             <a:endParaRPr lang="en-US" sz="900" dirty="0"/>
           </a:p>
@@ -6746,7 +6894,7 @@
                 <a:ea typeface="Calibri" pitchFamily="34" charset="-122"/>
                 <a:cs typeface="Calibri" pitchFamily="34" charset="-120"/>
               </a:rPr>
-              <a:t>MLOps · MBABD-PT 2026–27 · Session 7 · Juan Ramírez</a:t>
+              <a:t>MLOps · MBDS-PT2026F · Session 7 · Juan Ramírez</a:t>
             </a:r>
             <a:endParaRPr lang="en-US" sz="800" dirty="0"/>
           </a:p>
@@ -8210,6 +8358,10 @@
             <a:prstDash val="solid"/>
           </a:ln>
         </p:spPr>
+        <p:txBody>
+          <a:bodyPr/>
+          <a:p/>
+        </p:txBody>
       </p:sp>
       <p:pic>
         <p:nvPicPr>
@@ -8274,6 +8426,30 @@
           </a:p>
         </p:txBody>
       </p:sp>
+      <p:pic>
+        <p:nvPicPr>
+          <p:cNvPr id="14" name="IE University logo" descr="IE University, School of Science &amp; Technology"/>
+          <p:cNvPicPr>
+            <a:picLocks noChangeAspect="1"/>
+          </p:cNvPicPr>
+          <p:nvPr/>
+        </p:nvPicPr>
+        <p:blipFill>
+          <a:blip r:embed="rId4"/>
+          <a:stretch>
+            <a:fillRect/>
+          </a:stretch>
+        </p:blipFill>
+        <p:spPr>
+          <a:xfrm>
+            <a:off x="8013607" y="92634"/>
+            <a:ext cx="764633" cy="262789"/>
+          </a:xfrm>
+          <a:prstGeom prst="rect">
+            <a:avLst/>
+          </a:prstGeom>
+        </p:spPr>
+      </p:pic>
     </p:spTree>
   </p:cSld>
   <p:clrMapOvr>
@@ -8339,7 +8515,7 @@
                 <a:ea typeface="Calibri" pitchFamily="34" charset="-122"/>
                 <a:cs typeface="Calibri" pitchFamily="34" charset="-120"/>
               </a:rPr>
-              <a:t>Master in Business Analytics and Big Data</a:t>
+              <a:t>Master in Business Analytics and Data Science</a:t>
             </a:r>
             <a:endParaRPr lang="en-US" sz="900" dirty="0"/>
           </a:p>
@@ -8378,7 +8554,7 @@
                 <a:ea typeface="Calibri" pitchFamily="34" charset="-122"/>
                 <a:cs typeface="Calibri" pitchFamily="34" charset="-120"/>
               </a:rPr>
-              <a:t>MLOps · MBABD-PT 2026–27 · Session 7 · Juan Ramírez</a:t>
+              <a:t>MLOps · MBDS-PT2026F · Session 7 · Juan Ramírez</a:t>
             </a:r>
             <a:endParaRPr lang="en-US" sz="800" dirty="0"/>
           </a:p>
@@ -8486,6 +8662,10 @@
             <a:prstDash val="solid"/>
           </a:ln>
         </p:spPr>
+        <p:txBody>
+          <a:bodyPr/>
+          <a:p/>
+        </p:txBody>
       </p:sp>
       <p:sp>
         <p:nvSpPr>
@@ -8550,6 +8730,10 @@
             <a:prstDash val="solid"/>
           </a:ln>
         </p:spPr>
+        <p:txBody>
+          <a:bodyPr/>
+          <a:p/>
+        </p:txBody>
       </p:sp>
       <p:sp>
         <p:nvSpPr>
@@ -8614,6 +8798,10 @@
             <a:prstDash val="solid"/>
           </a:ln>
         </p:spPr>
+        <p:txBody>
+          <a:bodyPr/>
+          <a:p/>
+        </p:txBody>
       </p:sp>
       <p:sp>
         <p:nvSpPr>
@@ -8678,6 +8866,10 @@
             <a:prstDash val="solid"/>
           </a:ln>
         </p:spPr>
+        <p:txBody>
+          <a:bodyPr/>
+          <a:p/>
+        </p:txBody>
       </p:sp>
       <p:sp>
         <p:nvSpPr>
@@ -8742,6 +8934,10 @@
             <a:prstDash val="solid"/>
           </a:ln>
         </p:spPr>
+        <p:txBody>
+          <a:bodyPr/>
+          <a:p/>
+        </p:txBody>
       </p:sp>
       <p:sp>
         <p:nvSpPr>
@@ -8806,6 +9002,10 @@
             <a:prstDash val="solid"/>
           </a:ln>
         </p:spPr>
+        <p:txBody>
+          <a:bodyPr/>
+          <a:p/>
+        </p:txBody>
       </p:sp>
       <p:sp>
         <p:nvSpPr>
@@ -8869,6 +9069,10 @@
             <a:tailEnd type="triangle"/>
           </a:ln>
         </p:spPr>
+        <p:txBody>
+          <a:bodyPr/>
+          <a:p/>
+        </p:txBody>
       </p:sp>
       <p:sp>
         <p:nvSpPr>
@@ -9169,6 +9373,10 @@
             <a:prstDash val="solid"/>
           </a:ln>
         </p:spPr>
+        <p:txBody>
+          <a:bodyPr/>
+          <a:p/>
+        </p:txBody>
       </p:sp>
       <p:sp>
         <p:nvSpPr>
@@ -9194,6 +9402,10 @@
             <a:prstDash val="solid"/>
           </a:ln>
         </p:spPr>
+        <p:txBody>
+          <a:bodyPr/>
+          <a:p/>
+        </p:txBody>
       </p:sp>
       <p:pic>
         <p:nvPicPr>
@@ -9323,6 +9535,10 @@
             <a:prstDash val="solid"/>
           </a:ln>
         </p:spPr>
+        <p:txBody>
+          <a:bodyPr/>
+          <a:p/>
+        </p:txBody>
       </p:sp>
       <p:sp>
         <p:nvSpPr>
@@ -9348,6 +9564,10 @@
             <a:prstDash val="solid"/>
           </a:ln>
         </p:spPr>
+        <p:txBody>
+          <a:bodyPr/>
+          <a:p/>
+        </p:txBody>
       </p:sp>
       <p:pic>
         <p:nvPicPr>
@@ -9477,6 +9697,10 @@
             <a:prstDash val="solid"/>
           </a:ln>
         </p:spPr>
+        <p:txBody>
+          <a:bodyPr/>
+          <a:p/>
+        </p:txBody>
       </p:sp>
       <p:sp>
         <p:nvSpPr>
@@ -9502,6 +9726,10 @@
             <a:prstDash val="solid"/>
           </a:ln>
         </p:spPr>
+        <p:txBody>
+          <a:bodyPr/>
+          <a:p/>
+        </p:txBody>
       </p:sp>
       <p:pic>
         <p:nvPicPr>
@@ -9605,6 +9833,30 @@
           </a:p>
         </p:txBody>
       </p:sp>
+      <p:pic>
+        <p:nvPicPr>
+          <p:cNvPr id="42" name="IE University logo" descr="IE University, School of Science &amp; Technology"/>
+          <p:cNvPicPr>
+            <a:picLocks noChangeAspect="1"/>
+          </p:cNvPicPr>
+          <p:nvPr/>
+        </p:nvPicPr>
+        <p:blipFill>
+          <a:blip r:embed="rId6"/>
+          <a:stretch>
+            <a:fillRect/>
+          </a:stretch>
+        </p:blipFill>
+        <p:spPr>
+          <a:xfrm>
+            <a:off x="8013607" y="92634"/>
+            <a:ext cx="764633" cy="262789"/>
+          </a:xfrm>
+          <a:prstGeom prst="rect">
+            <a:avLst/>
+          </a:prstGeom>
+        </p:spPr>
+      </p:pic>
     </p:spTree>
   </p:cSld>
   <p:clrMapOvr>
@@ -9670,7 +9922,7 @@
                 <a:ea typeface="Calibri" pitchFamily="34" charset="-122"/>
                 <a:cs typeface="Calibri" pitchFamily="34" charset="-120"/>
               </a:rPr>
-              <a:t>Master in Business Analytics and Big Data</a:t>
+              <a:t>Master in Business Analytics and Data Science</a:t>
             </a:r>
             <a:endParaRPr lang="en-US" sz="900" dirty="0"/>
           </a:p>
@@ -9709,7 +9961,7 @@
                 <a:ea typeface="Calibri" pitchFamily="34" charset="-122"/>
                 <a:cs typeface="Calibri" pitchFamily="34" charset="-120"/>
               </a:rPr>
-              <a:t>MLOps · MBABD-PT 2026–27 · Session 7 · Juan Ramírez</a:t>
+              <a:t>MLOps · MBDS-PT2026F · Session 7 · Juan Ramírez</a:t>
             </a:r>
             <a:endParaRPr lang="en-US" sz="800" dirty="0"/>
           </a:p>
@@ -9817,6 +10069,10 @@
             <a:prstDash val="solid"/>
           </a:ln>
         </p:spPr>
+        <p:txBody>
+          <a:bodyPr/>
+          <a:p/>
+        </p:txBody>
       </p:sp>
       <p:pic>
         <p:nvPicPr>
@@ -9944,6 +10200,10 @@
             <a:prstDash val="solid"/>
           </a:ln>
         </p:spPr>
+        <p:txBody>
+          <a:bodyPr/>
+          <a:p/>
+        </p:txBody>
       </p:sp>
       <p:pic>
         <p:nvPicPr>
@@ -10071,6 +10331,10 @@
             <a:prstDash val="solid"/>
           </a:ln>
         </p:spPr>
+        <p:txBody>
+          <a:bodyPr/>
+          <a:p/>
+        </p:txBody>
       </p:sp>
       <p:pic>
         <p:nvPicPr>
@@ -10200,6 +10464,10 @@
             <a:prstDash val="solid"/>
           </a:ln>
         </p:spPr>
+        <p:txBody>
+          <a:bodyPr/>
+          <a:p/>
+        </p:txBody>
       </p:sp>
       <p:pic>
         <p:nvPicPr>
@@ -10303,6 +10571,30 @@
           </a:p>
         </p:txBody>
       </p:sp>
+      <p:pic>
+        <p:nvPicPr>
+          <p:cNvPr id="23" name="IE University logo" descr="IE University, School of Science &amp; Technology"/>
+          <p:cNvPicPr>
+            <a:picLocks noChangeAspect="1"/>
+          </p:cNvPicPr>
+          <p:nvPr/>
+        </p:nvPicPr>
+        <p:blipFill>
+          <a:blip r:embed="rId7"/>
+          <a:stretch>
+            <a:fillRect/>
+          </a:stretch>
+        </p:blipFill>
+        <p:spPr>
+          <a:xfrm>
+            <a:off x="8013607" y="92634"/>
+            <a:ext cx="764633" cy="262789"/>
+          </a:xfrm>
+          <a:prstGeom prst="rect">
+            <a:avLst/>
+          </a:prstGeom>
+        </p:spPr>
+      </p:pic>
     </p:spTree>
   </p:cSld>
   <p:clrMapOvr>
@@ -10368,7 +10660,7 @@
                 <a:ea typeface="Calibri" pitchFamily="34" charset="-122"/>
                 <a:cs typeface="Calibri" pitchFamily="34" charset="-120"/>
               </a:rPr>
-              <a:t>Master in Business Analytics and Big Data</a:t>
+              <a:t>Master in Business Analytics and Data Science</a:t>
             </a:r>
             <a:endParaRPr lang="en-US" sz="900" dirty="0"/>
           </a:p>
@@ -10407,7 +10699,7 @@
                 <a:ea typeface="Calibri" pitchFamily="34" charset="-122"/>
                 <a:cs typeface="Calibri" pitchFamily="34" charset="-120"/>
               </a:rPr>
-              <a:t>MLOps · MBABD-PT 2026–27 · Session 7 · Juan Ramírez</a:t>
+              <a:t>MLOps · MBDS-PT2026F · Session 7 · Juan Ramírez</a:t>
             </a:r>
             <a:endParaRPr lang="en-US" sz="800" dirty="0"/>
           </a:p>
@@ -10541,6 +10833,10 @@
             <a:prstDash val="solid"/>
           </a:ln>
         </p:spPr>
+        <p:txBody>
+          <a:bodyPr/>
+          <a:p/>
+        </p:txBody>
       </p:sp>
       <p:sp>
         <p:nvSpPr>
@@ -10566,6 +10862,10 @@
             <a:prstDash val="solid"/>
           </a:ln>
         </p:spPr>
+        <p:txBody>
+          <a:bodyPr/>
+          <a:p/>
+        </p:txBody>
       </p:sp>
       <p:pic>
         <p:nvPicPr>
@@ -10695,6 +10995,10 @@
             <a:prstDash val="solid"/>
           </a:ln>
         </p:spPr>
+        <p:txBody>
+          <a:bodyPr/>
+          <a:p/>
+        </p:txBody>
       </p:sp>
       <p:sp>
         <p:nvSpPr>
@@ -10720,6 +11024,10 @@
             <a:prstDash val="solid"/>
           </a:ln>
         </p:spPr>
+        <p:txBody>
+          <a:bodyPr/>
+          <a:p/>
+        </p:txBody>
       </p:sp>
       <p:pic>
         <p:nvPicPr>
@@ -10849,6 +11157,10 @@
             <a:prstDash val="solid"/>
           </a:ln>
         </p:spPr>
+        <p:txBody>
+          <a:bodyPr/>
+          <a:p/>
+        </p:txBody>
       </p:sp>
       <p:pic>
         <p:nvPicPr>
@@ -10913,6 +11225,30 @@
           </a:p>
         </p:txBody>
       </p:sp>
+      <p:pic>
+        <p:nvPicPr>
+          <p:cNvPr id="21" name="IE University logo" descr="IE University, School of Science &amp; Technology"/>
+          <p:cNvPicPr>
+            <a:picLocks noChangeAspect="1"/>
+          </p:cNvPicPr>
+          <p:nvPr/>
+        </p:nvPicPr>
+        <p:blipFill>
+          <a:blip r:embed="rId7"/>
+          <a:stretch>
+            <a:fillRect/>
+          </a:stretch>
+        </p:blipFill>
+        <p:spPr>
+          <a:xfrm>
+            <a:off x="8013607" y="92634"/>
+            <a:ext cx="764633" cy="262789"/>
+          </a:xfrm>
+          <a:prstGeom prst="rect">
+            <a:avLst/>
+          </a:prstGeom>
+        </p:spPr>
+      </p:pic>
     </p:spTree>
   </p:cSld>
   <p:clrMapOvr>
@@ -10978,7 +11314,7 @@
                 <a:ea typeface="Calibri" pitchFamily="34" charset="-122"/>
                 <a:cs typeface="Calibri" pitchFamily="34" charset="-120"/>
               </a:rPr>
-              <a:t>Master in Business Analytics and Big Data</a:t>
+              <a:t>Master in Business Analytics and Data Science</a:t>
             </a:r>
             <a:endParaRPr lang="en-US" sz="900" dirty="0"/>
           </a:p>
@@ -11017,7 +11353,7 @@
                 <a:ea typeface="Calibri" pitchFamily="34" charset="-122"/>
                 <a:cs typeface="Calibri" pitchFamily="34" charset="-120"/>
               </a:rPr>
-              <a:t>MLOps · MBABD-PT 2026–27 · Session 7 · Juan Ramírez</a:t>
+              <a:t>MLOps · MBDS-PT2026F · Session 7 · Juan Ramírez</a:t>
             </a:r>
             <a:endParaRPr lang="en-US" sz="800" dirty="0"/>
           </a:p>
@@ -11127,6 +11463,10 @@
             <a:prstDash val="solid"/>
           </a:ln>
         </p:spPr>
+        <p:txBody>
+          <a:bodyPr/>
+          <a:p/>
+        </p:txBody>
       </p:sp>
       <p:sp>
         <p:nvSpPr>
@@ -11152,6 +11492,10 @@
             <a:prstDash val="solid"/>
           </a:ln>
         </p:spPr>
+        <p:txBody>
+          <a:bodyPr/>
+          <a:p/>
+        </p:txBody>
       </p:sp>
       <p:pic>
         <p:nvPicPr>
@@ -11327,6 +11671,10 @@
             <a:prstDash val="solid"/>
           </a:ln>
         </p:spPr>
+        <p:txBody>
+          <a:bodyPr/>
+          <a:p/>
+        </p:txBody>
       </p:sp>
       <p:sp>
         <p:nvSpPr>
@@ -11352,6 +11700,10 @@
             <a:prstDash val="solid"/>
           </a:ln>
         </p:spPr>
+        <p:txBody>
+          <a:bodyPr/>
+          <a:p/>
+        </p:txBody>
       </p:sp>
       <p:pic>
         <p:nvPicPr>
@@ -11527,6 +11879,10 @@
             <a:prstDash val="solid"/>
           </a:ln>
         </p:spPr>
+        <p:txBody>
+          <a:bodyPr/>
+          <a:p/>
+        </p:txBody>
       </p:sp>
       <p:pic>
         <p:nvPicPr>
@@ -11591,6 +11947,30 @@
           </a:p>
         </p:txBody>
       </p:sp>
+      <p:pic>
+        <p:nvPicPr>
+          <p:cNvPr id="20" name="IE University logo" descr="IE University, School of Science &amp; Technology"/>
+          <p:cNvPicPr>
+            <a:picLocks noChangeAspect="1"/>
+          </p:cNvPicPr>
+          <p:nvPr/>
+        </p:nvPicPr>
+        <p:blipFill>
+          <a:blip r:embed="rId6"/>
+          <a:stretch>
+            <a:fillRect/>
+          </a:stretch>
+        </p:blipFill>
+        <p:spPr>
+          <a:xfrm>
+            <a:off x="8013607" y="92634"/>
+            <a:ext cx="764633" cy="262789"/>
+          </a:xfrm>
+          <a:prstGeom prst="rect">
+            <a:avLst/>
+          </a:prstGeom>
+        </p:spPr>
+      </p:pic>
     </p:spTree>
   </p:cSld>
   <p:clrMapOvr>
@@ -11656,7 +12036,7 @@
                 <a:ea typeface="Calibri" pitchFamily="34" charset="-122"/>
                 <a:cs typeface="Calibri" pitchFamily="34" charset="-120"/>
               </a:rPr>
-              <a:t>Master in Business Analytics and Big Data</a:t>
+              <a:t>Master in Business Analytics and Data Science</a:t>
             </a:r>
             <a:endParaRPr lang="en-US" sz="900" dirty="0"/>
           </a:p>
@@ -11695,7 +12075,7 @@
                 <a:ea typeface="Calibri" pitchFamily="34" charset="-122"/>
                 <a:cs typeface="Calibri" pitchFamily="34" charset="-120"/>
               </a:rPr>
-              <a:t>MLOps · MBABD-PT 2026–27 · Session 7 · Juan Ramírez</a:t>
+              <a:t>MLOps · MBDS-PT2026F · Session 7 · Juan Ramírez</a:t>
             </a:r>
             <a:endParaRPr lang="en-US" sz="800" dirty="0"/>
           </a:p>
@@ -11844,6 +12224,10 @@
             <a:prstDash val="solid"/>
           </a:ln>
         </p:spPr>
+        <p:txBody>
+          <a:bodyPr/>
+          <a:p/>
+        </p:txBody>
       </p:sp>
       <p:sp>
         <p:nvSpPr>
@@ -11910,6 +12294,10 @@
             <a:prstDash val="solid"/>
           </a:ln>
         </p:spPr>
+        <p:txBody>
+          <a:bodyPr/>
+          <a:p/>
+        </p:txBody>
       </p:sp>
       <p:sp>
         <p:nvSpPr>
@@ -11976,6 +12364,10 @@
             <a:prstDash val="solid"/>
           </a:ln>
         </p:spPr>
+        <p:txBody>
+          <a:bodyPr/>
+          <a:p/>
+        </p:txBody>
       </p:sp>
       <p:sp>
         <p:nvSpPr>
@@ -12042,6 +12434,10 @@
             <a:prstDash val="solid"/>
           </a:ln>
         </p:spPr>
+        <p:txBody>
+          <a:bodyPr/>
+          <a:p/>
+        </p:txBody>
       </p:sp>
       <p:sp>
         <p:nvSpPr>
@@ -12108,6 +12504,10 @@
             <a:prstDash val="solid"/>
           </a:ln>
         </p:spPr>
+        <p:txBody>
+          <a:bodyPr/>
+          <a:p/>
+        </p:txBody>
       </p:sp>
       <p:sp>
         <p:nvSpPr>
@@ -12174,6 +12574,10 @@
             <a:prstDash val="solid"/>
           </a:ln>
         </p:spPr>
+        <p:txBody>
+          <a:bodyPr/>
+          <a:p/>
+        </p:txBody>
       </p:sp>
       <p:sp>
         <p:nvSpPr>
@@ -12240,6 +12644,10 @@
             <a:prstDash val="solid"/>
           </a:ln>
         </p:spPr>
+        <p:txBody>
+          <a:bodyPr/>
+          <a:p/>
+        </p:txBody>
       </p:sp>
       <p:sp>
         <p:nvSpPr>
@@ -12306,6 +12714,10 @@
             <a:prstDash val="solid"/>
           </a:ln>
         </p:spPr>
+        <p:txBody>
+          <a:bodyPr/>
+          <a:p/>
+        </p:txBody>
       </p:sp>
       <p:sp>
         <p:nvSpPr>
@@ -12372,6 +12784,10 @@
             <a:prstDash val="solid"/>
           </a:ln>
         </p:spPr>
+        <p:txBody>
+          <a:bodyPr/>
+          <a:p/>
+        </p:txBody>
       </p:sp>
       <p:sp>
         <p:nvSpPr>
@@ -12451,6 +12867,30 @@
           </a:p>
         </p:txBody>
       </p:sp>
+      <p:pic>
+        <p:nvPicPr>
+          <p:cNvPr id="26" name="IE University logo" descr="IE University, School of Science &amp; Technology"/>
+          <p:cNvPicPr>
+            <a:picLocks noChangeAspect="1"/>
+          </p:cNvPicPr>
+          <p:nvPr/>
+        </p:nvPicPr>
+        <p:blipFill>
+          <a:blip r:embed="rId3"/>
+          <a:stretch>
+            <a:fillRect/>
+          </a:stretch>
+        </p:blipFill>
+        <p:spPr>
+          <a:xfrm>
+            <a:off x="8252653" y="109728"/>
+            <a:ext cx="525587" cy="704395"/>
+          </a:xfrm>
+          <a:prstGeom prst="rect">
+            <a:avLst/>
+          </a:prstGeom>
+        </p:spPr>
+      </p:pic>
     </p:spTree>
   </p:cSld>
   <p:clrMapOvr>
@@ -12516,7 +12956,7 @@
                 <a:ea typeface="Calibri" pitchFamily="34" charset="-122"/>
                 <a:cs typeface="Calibri" pitchFamily="34" charset="-120"/>
               </a:rPr>
-              <a:t>Master in Business Analytics and Big Data</a:t>
+              <a:t>Master in Business Analytics and Data Science</a:t>
             </a:r>
             <a:endParaRPr lang="en-US" sz="900" dirty="0"/>
           </a:p>
@@ -12555,7 +12995,7 @@
                 <a:ea typeface="Calibri" pitchFamily="34" charset="-122"/>
                 <a:cs typeface="Calibri" pitchFamily="34" charset="-120"/>
               </a:rPr>
-              <a:t>MLOps · MBABD-PT 2026–27 · Session 7 · Juan Ramírez</a:t>
+              <a:t>MLOps · MBDS-PT2026F · Session 7 · Juan Ramírez</a:t>
             </a:r>
             <a:endParaRPr lang="en-US" sz="800" dirty="0"/>
           </a:p>
@@ -12663,6 +13103,10 @@
             <a:prstDash val="solid"/>
           </a:ln>
         </p:spPr>
+        <p:txBody>
+          <a:bodyPr/>
+          <a:p/>
+        </p:txBody>
       </p:sp>
       <p:pic>
         <p:nvPicPr>
@@ -12790,6 +13234,10 @@
             <a:prstDash val="solid"/>
           </a:ln>
         </p:spPr>
+        <p:txBody>
+          <a:bodyPr/>
+          <a:p/>
+        </p:txBody>
       </p:sp>
       <p:pic>
         <p:nvPicPr>
@@ -12917,6 +13365,10 @@
             <a:prstDash val="solid"/>
           </a:ln>
         </p:spPr>
+        <p:txBody>
+          <a:bodyPr/>
+          <a:p/>
+        </p:txBody>
       </p:sp>
       <p:pic>
         <p:nvPicPr>
@@ -13044,6 +13496,10 @@
             <a:prstDash val="solid"/>
           </a:ln>
         </p:spPr>
+        <p:txBody>
+          <a:bodyPr/>
+          <a:p/>
+        </p:txBody>
       </p:sp>
       <p:pic>
         <p:nvPicPr>
@@ -13173,6 +13629,10 @@
             <a:prstDash val="solid"/>
           </a:ln>
         </p:spPr>
+        <p:txBody>
+          <a:bodyPr/>
+          <a:p/>
+        </p:txBody>
       </p:sp>
       <p:pic>
         <p:nvPicPr>
@@ -13276,6 +13736,30 @@
           </a:p>
         </p:txBody>
       </p:sp>
+      <p:pic>
+        <p:nvPicPr>
+          <p:cNvPr id="27" name="IE University logo" descr="IE University, School of Science &amp; Technology"/>
+          <p:cNvPicPr>
+            <a:picLocks noChangeAspect="1"/>
+          </p:cNvPicPr>
+          <p:nvPr/>
+        </p:nvPicPr>
+        <p:blipFill>
+          <a:blip r:embed="rId8"/>
+          <a:stretch>
+            <a:fillRect/>
+          </a:stretch>
+        </p:blipFill>
+        <p:spPr>
+          <a:xfrm>
+            <a:off x="8013607" y="92634"/>
+            <a:ext cx="764633" cy="262789"/>
+          </a:xfrm>
+          <a:prstGeom prst="rect">
+            <a:avLst/>
+          </a:prstGeom>
+        </p:spPr>
+      </p:pic>
     </p:spTree>
   </p:cSld>
   <p:clrMapOvr>
@@ -13341,7 +13825,7 @@
                 <a:ea typeface="Calibri" pitchFamily="34" charset="-122"/>
                 <a:cs typeface="Calibri" pitchFamily="34" charset="-120"/>
               </a:rPr>
-              <a:t>Master in Business Analytics and Big Data</a:t>
+              <a:t>Master in Business Analytics and Data Science</a:t>
             </a:r>
             <a:endParaRPr lang="en-US" sz="900" dirty="0"/>
           </a:p>
@@ -13380,7 +13864,7 @@
                 <a:ea typeface="Calibri" pitchFamily="34" charset="-122"/>
                 <a:cs typeface="Calibri" pitchFamily="34" charset="-120"/>
               </a:rPr>
-              <a:t>MLOps · MBABD-PT 2026–27 · Session 7 · Juan Ramírez</a:t>
+              <a:t>MLOps · MBDS-PT2026F · Session 7 · Juan Ramírez</a:t>
             </a:r>
             <a:endParaRPr lang="en-US" sz="800" dirty="0"/>
           </a:p>
@@ -13490,6 +13974,10 @@
             <a:prstDash val="solid"/>
           </a:ln>
         </p:spPr>
+        <p:txBody>
+          <a:bodyPr/>
+          <a:p/>
+        </p:txBody>
       </p:sp>
       <p:sp>
         <p:nvSpPr>
@@ -13515,6 +14003,10 @@
             <a:prstDash val="solid"/>
           </a:ln>
         </p:spPr>
+        <p:txBody>
+          <a:bodyPr/>
+          <a:p/>
+        </p:txBody>
       </p:sp>
       <p:pic>
         <p:nvPicPr>
@@ -13644,6 +14136,10 @@
             <a:prstDash val="solid"/>
           </a:ln>
         </p:spPr>
+        <p:txBody>
+          <a:bodyPr/>
+          <a:p/>
+        </p:txBody>
       </p:sp>
       <p:sp>
         <p:nvSpPr>
@@ -13669,6 +14165,10 @@
             <a:prstDash val="solid"/>
           </a:ln>
         </p:spPr>
+        <p:txBody>
+          <a:bodyPr/>
+          <a:p/>
+        </p:txBody>
       </p:sp>
       <p:pic>
         <p:nvPicPr>
@@ -13798,6 +14298,10 @@
             <a:prstDash val="solid"/>
           </a:ln>
         </p:spPr>
+        <p:txBody>
+          <a:bodyPr/>
+          <a:p/>
+        </p:txBody>
       </p:sp>
       <p:sp>
         <p:nvSpPr>
@@ -13823,6 +14327,10 @@
             <a:prstDash val="solid"/>
           </a:ln>
         </p:spPr>
+        <p:txBody>
+          <a:bodyPr/>
+          <a:p/>
+        </p:txBody>
       </p:sp>
       <p:pic>
         <p:nvPicPr>
@@ -13952,6 +14460,10 @@
             <a:prstDash val="solid"/>
           </a:ln>
         </p:spPr>
+        <p:txBody>
+          <a:bodyPr/>
+          <a:p/>
+        </p:txBody>
       </p:sp>
       <p:sp>
         <p:nvSpPr>
@@ -13977,6 +14489,10 @@
             <a:prstDash val="solid"/>
           </a:ln>
         </p:spPr>
+        <p:txBody>
+          <a:bodyPr/>
+          <a:p/>
+        </p:txBody>
       </p:sp>
       <p:pic>
         <p:nvPicPr>
@@ -14080,6 +14596,30 @@
           </a:p>
         </p:txBody>
       </p:sp>
+      <p:pic>
+        <p:nvPicPr>
+          <p:cNvPr id="27" name="IE University logo" descr="IE University, School of Science &amp; Technology"/>
+          <p:cNvPicPr>
+            <a:picLocks noChangeAspect="1"/>
+          </p:cNvPicPr>
+          <p:nvPr/>
+        </p:nvPicPr>
+        <p:blipFill>
+          <a:blip r:embed="rId7"/>
+          <a:stretch>
+            <a:fillRect/>
+          </a:stretch>
+        </p:blipFill>
+        <p:spPr>
+          <a:xfrm>
+            <a:off x="8013607" y="92634"/>
+            <a:ext cx="764633" cy="262789"/>
+          </a:xfrm>
+          <a:prstGeom prst="rect">
+            <a:avLst/>
+          </a:prstGeom>
+        </p:spPr>
+      </p:pic>
     </p:spTree>
   </p:cSld>
   <p:clrMapOvr>
@@ -14145,7 +14685,7 @@
                 <a:ea typeface="Calibri" pitchFamily="34" charset="-122"/>
                 <a:cs typeface="Calibri" pitchFamily="34" charset="-120"/>
               </a:rPr>
-              <a:t>Master in Business Analytics and Big Data</a:t>
+              <a:t>Master in Business Analytics and Data Science</a:t>
             </a:r>
             <a:endParaRPr lang="en-US" sz="900" dirty="0"/>
           </a:p>
@@ -14184,7 +14724,7 @@
                 <a:ea typeface="Calibri" pitchFamily="34" charset="-122"/>
                 <a:cs typeface="Calibri" pitchFamily="34" charset="-120"/>
               </a:rPr>
-              <a:t>MLOps · MBABD-PT 2026–27 · Session 7 · Juan Ramírez</a:t>
+              <a:t>MLOps · MBDS-PT2026F · Session 7 · Juan Ramírez</a:t>
             </a:r>
             <a:endParaRPr lang="en-US" sz="800" dirty="0"/>
           </a:p>
@@ -14333,6 +14873,10 @@
             <a:prstDash val="solid"/>
           </a:ln>
         </p:spPr>
+        <p:txBody>
+          <a:bodyPr/>
+          <a:p/>
+        </p:txBody>
       </p:sp>
       <p:sp>
         <p:nvSpPr>
@@ -14521,6 +15065,10 @@
             <a:prstDash val="solid"/>
           </a:ln>
         </p:spPr>
+        <p:txBody>
+          <a:bodyPr/>
+          <a:p/>
+        </p:txBody>
       </p:sp>
       <p:pic>
         <p:nvPicPr>
@@ -14648,6 +15196,10 @@
             <a:prstDash val="solid"/>
           </a:ln>
         </p:spPr>
+        <p:txBody>
+          <a:bodyPr/>
+          <a:p/>
+        </p:txBody>
       </p:sp>
       <p:pic>
         <p:nvPicPr>
@@ -16107,6 +16659,30 @@
           </a:graphicData>
         </a:graphic>
       </p:graphicFrame>
+      <p:pic>
+        <p:nvPicPr>
+          <p:cNvPr id="20" name="IE University logo" descr="IE University, School of Science &amp; Technology"/>
+          <p:cNvPicPr>
+            <a:picLocks noChangeAspect="1"/>
+          </p:cNvPicPr>
+          <p:nvPr/>
+        </p:nvPicPr>
+        <p:blipFill>
+          <a:blip r:embed="rId5"/>
+          <a:stretch>
+            <a:fillRect/>
+          </a:stretch>
+        </p:blipFill>
+        <p:spPr>
+          <a:xfrm>
+            <a:off x="8013607" y="92634"/>
+            <a:ext cx="764633" cy="262789"/>
+          </a:xfrm>
+          <a:prstGeom prst="rect">
+            <a:avLst/>
+          </a:prstGeom>
+        </p:spPr>
+      </p:pic>
     </p:spTree>
   </p:cSld>
   <p:clrMapOvr>
@@ -16172,7 +16748,7 @@
                 <a:ea typeface="Calibri" pitchFamily="34" charset="-122"/>
                 <a:cs typeface="Calibri" pitchFamily="34" charset="-120"/>
               </a:rPr>
-              <a:t>Master in Business Analytics and Big Data</a:t>
+              <a:t>Master in Business Analytics and Data Science</a:t>
             </a:r>
             <a:endParaRPr lang="en-US" sz="900" dirty="0"/>
           </a:p>
@@ -16211,7 +16787,7 @@
                 <a:ea typeface="Calibri" pitchFamily="34" charset="-122"/>
                 <a:cs typeface="Calibri" pitchFamily="34" charset="-120"/>
               </a:rPr>
-              <a:t>MLOps · MBABD-PT 2026–27 · Session 7 · Juan Ramírez</a:t>
+              <a:t>MLOps · MBDS-PT2026F · Session 7 · Juan Ramírez</a:t>
             </a:r>
             <a:endParaRPr lang="en-US" sz="800" dirty="0"/>
           </a:p>
@@ -16345,6 +16921,10 @@
             <a:prstDash val="solid"/>
           </a:ln>
         </p:spPr>
+        <p:txBody>
+          <a:bodyPr/>
+          <a:p/>
+        </p:txBody>
       </p:sp>
       <p:sp>
         <p:nvSpPr>
@@ -16370,6 +16950,10 @@
             <a:prstDash val="solid"/>
           </a:ln>
         </p:spPr>
+        <p:txBody>
+          <a:bodyPr/>
+          <a:p/>
+        </p:txBody>
       </p:sp>
       <p:pic>
         <p:nvPicPr>
@@ -16499,6 +17083,10 @@
             <a:prstDash val="solid"/>
           </a:ln>
         </p:spPr>
+        <p:txBody>
+          <a:bodyPr/>
+          <a:p/>
+        </p:txBody>
       </p:sp>
       <p:sp>
         <p:nvSpPr>
@@ -16524,6 +17112,10 @@
             <a:prstDash val="solid"/>
           </a:ln>
         </p:spPr>
+        <p:txBody>
+          <a:bodyPr/>
+          <a:p/>
+        </p:txBody>
       </p:sp>
       <p:pic>
         <p:nvPicPr>
@@ -16653,6 +17245,10 @@
             <a:prstDash val="solid"/>
           </a:ln>
         </p:spPr>
+        <p:txBody>
+          <a:bodyPr/>
+          <a:p/>
+        </p:txBody>
       </p:sp>
       <p:pic>
         <p:nvPicPr>
@@ -16717,6 +17313,30 @@
           </a:p>
         </p:txBody>
       </p:sp>
+      <p:pic>
+        <p:nvPicPr>
+          <p:cNvPr id="21" name="IE University logo" descr="IE University, School of Science &amp; Technology"/>
+          <p:cNvPicPr>
+            <a:picLocks noChangeAspect="1"/>
+          </p:cNvPicPr>
+          <p:nvPr/>
+        </p:nvPicPr>
+        <p:blipFill>
+          <a:blip r:embed="rId7"/>
+          <a:stretch>
+            <a:fillRect/>
+          </a:stretch>
+        </p:blipFill>
+        <p:spPr>
+          <a:xfrm>
+            <a:off x="8013607" y="92634"/>
+            <a:ext cx="764633" cy="262789"/>
+          </a:xfrm>
+          <a:prstGeom prst="rect">
+            <a:avLst/>
+          </a:prstGeom>
+        </p:spPr>
+      </p:pic>
     </p:spTree>
   </p:cSld>
   <p:clrMapOvr>
@@ -16782,7 +17402,7 @@
                 <a:ea typeface="Calibri" pitchFamily="34" charset="-122"/>
                 <a:cs typeface="Calibri" pitchFamily="34" charset="-120"/>
               </a:rPr>
-              <a:t>Master in Business Analytics and Big Data</a:t>
+              <a:t>Master in Business Analytics and Data Science</a:t>
             </a:r>
             <a:endParaRPr lang="en-US" sz="900" dirty="0"/>
           </a:p>
@@ -16821,7 +17441,7 @@
                 <a:ea typeface="Calibri" pitchFamily="34" charset="-122"/>
                 <a:cs typeface="Calibri" pitchFamily="34" charset="-120"/>
               </a:rPr>
-              <a:t>MLOps · MBABD-PT 2026–27 · Session 7 · Juan Ramírez</a:t>
+              <a:t>MLOps · MBDS-PT2026F · Session 7 · Juan Ramírez</a:t>
             </a:r>
             <a:endParaRPr lang="en-US" sz="800" dirty="0"/>
           </a:p>
@@ -16979,6 +17599,10 @@
             <a:prstDash val="solid"/>
           </a:ln>
         </p:spPr>
+        <p:txBody>
+          <a:bodyPr/>
+          <a:p/>
+        </p:txBody>
       </p:sp>
       <p:sp>
         <p:nvSpPr>
@@ -17084,6 +17708,10 @@
             <a:prstDash val="solid"/>
           </a:ln>
         </p:spPr>
+        <p:txBody>
+          <a:bodyPr/>
+          <a:p/>
+        </p:txBody>
       </p:sp>
       <p:sp>
         <p:nvSpPr>
@@ -17163,6 +17791,30 @@
           </a:p>
         </p:txBody>
       </p:sp>
+      <p:pic>
+        <p:nvPicPr>
+          <p:cNvPr id="15" name="IE University logo" descr="IE University, School of Science &amp; Technology"/>
+          <p:cNvPicPr>
+            <a:picLocks noChangeAspect="1"/>
+          </p:cNvPicPr>
+          <p:nvPr/>
+        </p:nvPicPr>
+        <p:blipFill>
+          <a:blip r:embed="rId5"/>
+          <a:stretch>
+            <a:fillRect/>
+          </a:stretch>
+        </p:blipFill>
+        <p:spPr>
+          <a:xfrm>
+            <a:off x="8013607" y="92634"/>
+            <a:ext cx="764633" cy="262789"/>
+          </a:xfrm>
+          <a:prstGeom prst="rect">
+            <a:avLst/>
+          </a:prstGeom>
+        </p:spPr>
+      </p:pic>
     </p:spTree>
   </p:cSld>
   <p:clrMapOvr>
@@ -17228,7 +17880,7 @@
                 <a:ea typeface="Calibri" pitchFamily="34" charset="-122"/>
                 <a:cs typeface="Calibri" pitchFamily="34" charset="-120"/>
               </a:rPr>
-              <a:t>Master in Business Analytics and Big Data</a:t>
+              <a:t>Master in Business Analytics and Data Science</a:t>
             </a:r>
             <a:endParaRPr lang="en-US" sz="900" dirty="0"/>
           </a:p>
@@ -17267,7 +17919,7 @@
                 <a:ea typeface="Calibri" pitchFamily="34" charset="-122"/>
                 <a:cs typeface="Calibri" pitchFamily="34" charset="-120"/>
               </a:rPr>
-              <a:t>MLOps · MBABD-PT 2026–27 · Session 7 · Juan Ramírez</a:t>
+              <a:t>MLOps · MBDS-PT2026F · Session 7 · Juan Ramírez</a:t>
             </a:r>
             <a:endParaRPr lang="en-US" sz="800" dirty="0"/>
           </a:p>
@@ -17375,6 +18027,10 @@
             <a:prstDash val="solid"/>
           </a:ln>
         </p:spPr>
+        <p:txBody>
+          <a:bodyPr/>
+          <a:p/>
+        </p:txBody>
       </p:sp>
       <p:sp>
         <p:nvSpPr>
@@ -17517,6 +18173,10 @@
             <a:prstDash val="solid"/>
           </a:ln>
         </p:spPr>
+        <p:txBody>
+          <a:bodyPr/>
+          <a:p/>
+        </p:txBody>
       </p:sp>
       <p:sp>
         <p:nvSpPr>
@@ -17659,6 +18319,10 @@
             <a:prstDash val="solid"/>
           </a:ln>
         </p:spPr>
+        <p:txBody>
+          <a:bodyPr/>
+          <a:p/>
+        </p:txBody>
       </p:sp>
       <p:sp>
         <p:nvSpPr>
@@ -17803,6 +18467,10 @@
             <a:prstDash val="solid"/>
           </a:ln>
         </p:spPr>
+        <p:txBody>
+          <a:bodyPr/>
+          <a:p/>
+        </p:txBody>
       </p:sp>
       <p:pic>
         <p:nvPicPr>
@@ -17867,6 +18535,30 @@
           </a:p>
         </p:txBody>
       </p:sp>
+      <p:pic>
+        <p:nvPicPr>
+          <p:cNvPr id="22" name="IE University logo" descr="IE University, School of Science &amp; Technology"/>
+          <p:cNvPicPr>
+            <a:picLocks noChangeAspect="1"/>
+          </p:cNvPicPr>
+          <p:nvPr/>
+        </p:nvPicPr>
+        <p:blipFill>
+          <a:blip r:embed="rId4"/>
+          <a:stretch>
+            <a:fillRect/>
+          </a:stretch>
+        </p:blipFill>
+        <p:spPr>
+          <a:xfrm>
+            <a:off x="8013607" y="92634"/>
+            <a:ext cx="764633" cy="262789"/>
+          </a:xfrm>
+          <a:prstGeom prst="rect">
+            <a:avLst/>
+          </a:prstGeom>
+        </p:spPr>
+      </p:pic>
     </p:spTree>
   </p:cSld>
   <p:clrMapOvr>
@@ -17932,7 +18624,7 @@
                 <a:ea typeface="Calibri" pitchFamily="34" charset="-122"/>
                 <a:cs typeface="Calibri" pitchFamily="34" charset="-120"/>
               </a:rPr>
-              <a:t>Master in Business Analytics and Big Data</a:t>
+              <a:t>Master in Business Analytics and Data Science</a:t>
             </a:r>
             <a:endParaRPr lang="en-US" sz="900" dirty="0"/>
           </a:p>
@@ -17971,7 +18663,7 @@
                 <a:ea typeface="Calibri" pitchFamily="34" charset="-122"/>
                 <a:cs typeface="Calibri" pitchFamily="34" charset="-120"/>
               </a:rPr>
-              <a:t>MLOps · MBABD-PT 2026–27 · Session 7 · Juan Ramírez</a:t>
+              <a:t>MLOps · MBDS-PT2026F · Session 7 · Juan Ramírez</a:t>
             </a:r>
             <a:endParaRPr lang="en-US" sz="800" dirty="0"/>
           </a:p>
@@ -18079,6 +18771,10 @@
             <a:prstDash val="solid"/>
           </a:ln>
         </p:spPr>
+        <p:txBody>
+          <a:bodyPr/>
+          <a:p/>
+        </p:txBody>
       </p:sp>
       <p:sp>
         <p:nvSpPr>
@@ -18143,6 +18839,10 @@
             <a:prstDash val="solid"/>
           </a:ln>
         </p:spPr>
+        <p:txBody>
+          <a:bodyPr/>
+          <a:p/>
+        </p:txBody>
       </p:sp>
       <p:sp>
         <p:nvSpPr>
@@ -18207,6 +18907,10 @@
             <a:prstDash val="solid"/>
           </a:ln>
         </p:spPr>
+        <p:txBody>
+          <a:bodyPr/>
+          <a:p/>
+        </p:txBody>
       </p:sp>
       <p:sp>
         <p:nvSpPr>
@@ -18390,6 +19094,10 @@
             <a:prstDash val="solid"/>
           </a:ln>
         </p:spPr>
+        <p:txBody>
+          <a:bodyPr/>
+          <a:p/>
+        </p:txBody>
       </p:sp>
       <p:sp>
         <p:nvSpPr>
@@ -18415,6 +19123,10 @@
             <a:prstDash val="solid"/>
           </a:ln>
         </p:spPr>
+        <p:txBody>
+          <a:bodyPr/>
+          <a:p/>
+        </p:txBody>
       </p:sp>
       <p:pic>
         <p:nvPicPr>
@@ -18544,6 +19256,10 @@
             <a:prstDash val="solid"/>
           </a:ln>
         </p:spPr>
+        <p:txBody>
+          <a:bodyPr/>
+          <a:p/>
+        </p:txBody>
       </p:sp>
       <p:sp>
         <p:nvSpPr>
@@ -18569,6 +19285,10 @@
             <a:prstDash val="solid"/>
           </a:ln>
         </p:spPr>
+        <p:txBody>
+          <a:bodyPr/>
+          <a:p/>
+        </p:txBody>
       </p:sp>
       <p:pic>
         <p:nvPicPr>
@@ -18698,6 +19418,10 @@
             <a:prstDash val="solid"/>
           </a:ln>
         </p:spPr>
+        <p:txBody>
+          <a:bodyPr/>
+          <a:p/>
+        </p:txBody>
       </p:sp>
       <p:pic>
         <p:nvPicPr>
@@ -18762,6 +19486,30 @@
           </a:p>
         </p:txBody>
       </p:sp>
+      <p:pic>
+        <p:nvPicPr>
+          <p:cNvPr id="29" name="IE University logo" descr="IE University, School of Science &amp; Technology"/>
+          <p:cNvPicPr>
+            <a:picLocks noChangeAspect="1"/>
+          </p:cNvPicPr>
+          <p:nvPr/>
+        </p:nvPicPr>
+        <p:blipFill>
+          <a:blip r:embed="rId6"/>
+          <a:stretch>
+            <a:fillRect/>
+          </a:stretch>
+        </p:blipFill>
+        <p:spPr>
+          <a:xfrm>
+            <a:off x="8013607" y="92634"/>
+            <a:ext cx="764633" cy="262789"/>
+          </a:xfrm>
+          <a:prstGeom prst="rect">
+            <a:avLst/>
+          </a:prstGeom>
+        </p:spPr>
+      </p:pic>
     </p:spTree>
   </p:cSld>
   <p:clrMapOvr>
@@ -18827,7 +19575,7 @@
                 <a:ea typeface="Calibri" pitchFamily="34" charset="-122"/>
                 <a:cs typeface="Calibri" pitchFamily="34" charset="-120"/>
               </a:rPr>
-              <a:t>Master in Business Analytics and Big Data</a:t>
+              <a:t>Master in Business Analytics and Data Science</a:t>
             </a:r>
             <a:endParaRPr lang="en-US" sz="900" dirty="0"/>
           </a:p>
@@ -18866,7 +19614,7 @@
                 <a:ea typeface="Calibri" pitchFamily="34" charset="-122"/>
                 <a:cs typeface="Calibri" pitchFamily="34" charset="-120"/>
               </a:rPr>
-              <a:t>MLOps · MBABD-PT 2026–27 · Session 7 · Juan Ramírez</a:t>
+              <a:t>MLOps · MBDS-PT2026F · Session 7 · Juan Ramírez</a:t>
             </a:r>
             <a:endParaRPr lang="en-US" sz="800" dirty="0"/>
           </a:p>
@@ -18989,6 +19737,30 @@
           </a:p>
         </p:txBody>
       </p:sp>
+      <p:pic>
+        <p:nvPicPr>
+          <p:cNvPr id="7" name="IE University logo" descr="IE University, School of Science &amp; Technology"/>
+          <p:cNvPicPr>
+            <a:picLocks noChangeAspect="1"/>
+          </p:cNvPicPr>
+          <p:nvPr/>
+        </p:nvPicPr>
+        <p:blipFill>
+          <a:blip r:embed="rId3"/>
+          <a:stretch>
+            <a:fillRect/>
+          </a:stretch>
+        </p:blipFill>
+        <p:spPr>
+          <a:xfrm>
+            <a:off x="8252653" y="109728"/>
+            <a:ext cx="525587" cy="704395"/>
+          </a:xfrm>
+          <a:prstGeom prst="rect">
+            <a:avLst/>
+          </a:prstGeom>
+        </p:spPr>
+      </p:pic>
     </p:spTree>
   </p:cSld>
   <p:clrMapOvr>
@@ -19054,7 +19826,7 @@
                 <a:ea typeface="Calibri" pitchFamily="34" charset="-122"/>
                 <a:cs typeface="Calibri" pitchFamily="34" charset="-120"/>
               </a:rPr>
-              <a:t>Master in Business Analytics and Big Data</a:t>
+              <a:t>Master in Business Analytics and Data Science</a:t>
             </a:r>
             <a:endParaRPr lang="en-US" sz="900" dirty="0"/>
           </a:p>
@@ -19093,7 +19865,7 @@
                 <a:ea typeface="Calibri" pitchFamily="34" charset="-122"/>
                 <a:cs typeface="Calibri" pitchFamily="34" charset="-120"/>
               </a:rPr>
-              <a:t>MLOps · MBABD-PT 2026–27 · Session 7 · Juan Ramírez</a:t>
+              <a:t>MLOps · MBDS-PT2026F · Session 7 · Juan Ramírez</a:t>
             </a:r>
             <a:endParaRPr lang="en-US" sz="800" dirty="0"/>
           </a:p>
@@ -19242,6 +20014,10 @@
             <a:prstDash val="solid"/>
           </a:ln>
         </p:spPr>
+        <p:txBody>
+          <a:bodyPr/>
+          <a:p/>
+        </p:txBody>
       </p:sp>
       <p:sp>
         <p:nvSpPr>
@@ -19308,6 +20084,10 @@
             <a:prstDash val="solid"/>
           </a:ln>
         </p:spPr>
+        <p:txBody>
+          <a:bodyPr/>
+          <a:p/>
+        </p:txBody>
       </p:sp>
       <p:sp>
         <p:nvSpPr>
@@ -19374,6 +20154,10 @@
             <a:prstDash val="solid"/>
           </a:ln>
         </p:spPr>
+        <p:txBody>
+          <a:bodyPr/>
+          <a:p/>
+        </p:txBody>
       </p:sp>
       <p:sp>
         <p:nvSpPr>
@@ -19440,6 +20224,10 @@
             <a:prstDash val="solid"/>
           </a:ln>
         </p:spPr>
+        <p:txBody>
+          <a:bodyPr/>
+          <a:p/>
+        </p:txBody>
       </p:sp>
       <p:sp>
         <p:nvSpPr>
@@ -19506,6 +20294,10 @@
             <a:prstDash val="solid"/>
           </a:ln>
         </p:spPr>
+        <p:txBody>
+          <a:bodyPr/>
+          <a:p/>
+        </p:txBody>
       </p:sp>
       <p:sp>
         <p:nvSpPr>
@@ -19572,6 +20364,10 @@
             <a:prstDash val="solid"/>
           </a:ln>
         </p:spPr>
+        <p:txBody>
+          <a:bodyPr/>
+          <a:p/>
+        </p:txBody>
       </p:sp>
       <p:sp>
         <p:nvSpPr>
@@ -19638,6 +20434,10 @@
             <a:prstDash val="solid"/>
           </a:ln>
         </p:spPr>
+        <p:txBody>
+          <a:bodyPr/>
+          <a:p/>
+        </p:txBody>
       </p:sp>
       <p:sp>
         <p:nvSpPr>
@@ -19704,6 +20504,10 @@
             <a:prstDash val="solid"/>
           </a:ln>
         </p:spPr>
+        <p:txBody>
+          <a:bodyPr/>
+          <a:p/>
+        </p:txBody>
       </p:sp>
       <p:sp>
         <p:nvSpPr>
@@ -19770,6 +20574,10 @@
             <a:prstDash val="solid"/>
           </a:ln>
         </p:spPr>
+        <p:txBody>
+          <a:bodyPr/>
+          <a:p/>
+        </p:txBody>
       </p:sp>
       <p:sp>
         <p:nvSpPr>
@@ -19849,6 +20657,30 @@
           </a:p>
         </p:txBody>
       </p:sp>
+      <p:pic>
+        <p:nvPicPr>
+          <p:cNvPr id="26" name="IE University logo" descr="IE University, School of Science &amp; Technology"/>
+          <p:cNvPicPr>
+            <a:picLocks noChangeAspect="1"/>
+          </p:cNvPicPr>
+          <p:nvPr/>
+        </p:nvPicPr>
+        <p:blipFill>
+          <a:blip r:embed="rId3"/>
+          <a:stretch>
+            <a:fillRect/>
+          </a:stretch>
+        </p:blipFill>
+        <p:spPr>
+          <a:xfrm>
+            <a:off x="8252653" y="109728"/>
+            <a:ext cx="525587" cy="704395"/>
+          </a:xfrm>
+          <a:prstGeom prst="rect">
+            <a:avLst/>
+          </a:prstGeom>
+        </p:spPr>
+      </p:pic>
     </p:spTree>
   </p:cSld>
   <p:clrMapOvr>
@@ -19914,7 +20746,7 @@
                 <a:ea typeface="Calibri" pitchFamily="34" charset="-122"/>
                 <a:cs typeface="Calibri" pitchFamily="34" charset="-120"/>
               </a:rPr>
-              <a:t>Master in Business Analytics and Big Data</a:t>
+              <a:t>Master in Business Analytics and Data Science</a:t>
             </a:r>
             <a:endParaRPr lang="en-US" sz="900" dirty="0"/>
           </a:p>
@@ -19953,7 +20785,7 @@
                 <a:ea typeface="Calibri" pitchFamily="34" charset="-122"/>
                 <a:cs typeface="Calibri" pitchFamily="34" charset="-120"/>
               </a:rPr>
-              <a:t>MLOps · MBABD-PT 2026–27 · Session 7 · Juan Ramírez</a:t>
+              <a:t>MLOps · MBDS-PT2026F · Session 7 · Juan Ramírez</a:t>
             </a:r>
             <a:endParaRPr lang="en-US" sz="800" dirty="0"/>
           </a:p>
@@ -20063,6 +20895,10 @@
             <a:prstDash val="solid"/>
           </a:ln>
         </p:spPr>
+        <p:txBody>
+          <a:bodyPr/>
+          <a:p/>
+        </p:txBody>
       </p:sp>
       <p:sp>
         <p:nvSpPr>
@@ -20088,6 +20924,10 @@
             <a:prstDash val="solid"/>
           </a:ln>
         </p:spPr>
+        <p:txBody>
+          <a:bodyPr/>
+          <a:p/>
+        </p:txBody>
       </p:sp>
       <p:pic>
         <p:nvPicPr>
@@ -20284,6 +21124,10 @@
             <a:prstDash val="solid"/>
           </a:ln>
         </p:spPr>
+        <p:txBody>
+          <a:bodyPr/>
+          <a:p/>
+        </p:txBody>
       </p:sp>
       <p:sp>
         <p:nvSpPr>
@@ -20309,6 +21153,10 @@
             <a:prstDash val="solid"/>
           </a:ln>
         </p:spPr>
+        <p:txBody>
+          <a:bodyPr/>
+          <a:p/>
+        </p:txBody>
       </p:sp>
       <p:pic>
         <p:nvPicPr>
@@ -20505,6 +21353,10 @@
             <a:prstDash val="solid"/>
           </a:ln>
         </p:spPr>
+        <p:txBody>
+          <a:bodyPr/>
+          <a:p/>
+        </p:txBody>
       </p:sp>
       <p:pic>
         <p:nvPicPr>
@@ -20608,6 +21460,30 @@
           </a:p>
         </p:txBody>
       </p:sp>
+      <p:pic>
+        <p:nvPicPr>
+          <p:cNvPr id="21" name="IE University logo" descr="IE University, School of Science &amp; Technology"/>
+          <p:cNvPicPr>
+            <a:picLocks noChangeAspect="1"/>
+          </p:cNvPicPr>
+          <p:nvPr/>
+        </p:nvPicPr>
+        <p:blipFill>
+          <a:blip r:embed="rId6"/>
+          <a:stretch>
+            <a:fillRect/>
+          </a:stretch>
+        </p:blipFill>
+        <p:spPr>
+          <a:xfrm>
+            <a:off x="8013607" y="92634"/>
+            <a:ext cx="764633" cy="262789"/>
+          </a:xfrm>
+          <a:prstGeom prst="rect">
+            <a:avLst/>
+          </a:prstGeom>
+        </p:spPr>
+      </p:pic>
     </p:spTree>
   </p:cSld>
   <p:clrMapOvr>
@@ -20673,7 +21549,7 @@
                 <a:ea typeface="Calibri" pitchFamily="34" charset="-122"/>
                 <a:cs typeface="Calibri" pitchFamily="34" charset="-120"/>
               </a:rPr>
-              <a:t>Master in Business Analytics and Big Data</a:t>
+              <a:t>Master in Business Analytics and Data Science</a:t>
             </a:r>
             <a:endParaRPr lang="en-US" sz="900" dirty="0"/>
           </a:p>
@@ -20712,7 +21588,7 @@
                 <a:ea typeface="Calibri" pitchFamily="34" charset="-122"/>
                 <a:cs typeface="Calibri" pitchFamily="34" charset="-120"/>
               </a:rPr>
-              <a:t>MLOps · MBABD-PT 2026–27 · Session 7 · Juan Ramírez</a:t>
+              <a:t>MLOps · MBDS-PT2026F · Session 7 · Juan Ramírez</a:t>
             </a:r>
             <a:endParaRPr lang="en-US" sz="800" dirty="0"/>
           </a:p>
@@ -22044,6 +22920,10 @@
             <a:prstDash val="solid"/>
           </a:ln>
         </p:spPr>
+        <p:txBody>
+          <a:bodyPr/>
+          <a:p/>
+        </p:txBody>
       </p:sp>
       <p:pic>
         <p:nvPicPr>
@@ -22108,6 +22988,30 @@
           </a:p>
         </p:txBody>
       </p:sp>
+      <p:pic>
+        <p:nvPicPr>
+          <p:cNvPr id="29" name="IE University logo" descr="IE University, School of Science &amp; Technology"/>
+          <p:cNvPicPr>
+            <a:picLocks noChangeAspect="1"/>
+          </p:cNvPicPr>
+          <p:nvPr/>
+        </p:nvPicPr>
+        <p:blipFill>
+          <a:blip r:embed="rId4"/>
+          <a:stretch>
+            <a:fillRect/>
+          </a:stretch>
+        </p:blipFill>
+        <p:spPr>
+          <a:xfrm>
+            <a:off x="8013607" y="92634"/>
+            <a:ext cx="764633" cy="262789"/>
+          </a:xfrm>
+          <a:prstGeom prst="rect">
+            <a:avLst/>
+          </a:prstGeom>
+        </p:spPr>
+      </p:pic>
     </p:spTree>
   </p:cSld>
   <p:clrMapOvr>
@@ -22173,7 +23077,7 @@
                 <a:ea typeface="Calibri" pitchFamily="34" charset="-122"/>
                 <a:cs typeface="Calibri" pitchFamily="34" charset="-120"/>
               </a:rPr>
-              <a:t>Master in Business Analytics and Big Data</a:t>
+              <a:t>Master in Business Analytics and Data Science</a:t>
             </a:r>
             <a:endParaRPr lang="en-US" sz="900" dirty="0"/>
           </a:p>
@@ -22212,7 +23116,7 @@
                 <a:ea typeface="Calibri" pitchFamily="34" charset="-122"/>
                 <a:cs typeface="Calibri" pitchFamily="34" charset="-120"/>
               </a:rPr>
-              <a:t>MLOps · MBABD-PT 2026–27 · Session 7 · Juan Ramírez</a:t>
+              <a:t>MLOps · MBDS-PT2026F · Session 7 · Juan Ramírez</a:t>
             </a:r>
             <a:endParaRPr lang="en-US" sz="800" dirty="0"/>
           </a:p>
@@ -22322,6 +23226,10 @@
             <a:prstDash val="solid"/>
           </a:ln>
         </p:spPr>
+        <p:txBody>
+          <a:bodyPr/>
+          <a:p/>
+        </p:txBody>
       </p:sp>
       <p:sp>
         <p:nvSpPr>
@@ -22427,6 +23335,10 @@
             <a:prstDash val="solid"/>
           </a:ln>
         </p:spPr>
+        <p:txBody>
+          <a:bodyPr/>
+          <a:p/>
+        </p:txBody>
       </p:sp>
       <p:sp>
         <p:nvSpPr>
@@ -22532,6 +23444,10 @@
             <a:prstDash val="solid"/>
           </a:ln>
         </p:spPr>
+        <p:txBody>
+          <a:bodyPr/>
+          <a:p/>
+        </p:txBody>
       </p:sp>
       <p:sp>
         <p:nvSpPr>
@@ -22637,6 +23553,10 @@
             <a:prstDash val="solid"/>
           </a:ln>
         </p:spPr>
+        <p:txBody>
+          <a:bodyPr/>
+          <a:p/>
+        </p:txBody>
       </p:sp>
       <p:sp>
         <p:nvSpPr>
@@ -22742,6 +23662,10 @@
             <a:prstDash val="solid"/>
           </a:ln>
         </p:spPr>
+        <p:txBody>
+          <a:bodyPr/>
+          <a:p/>
+        </p:txBody>
       </p:sp>
       <p:sp>
         <p:nvSpPr>
@@ -22847,6 +23771,10 @@
             <a:prstDash val="solid"/>
           </a:ln>
         </p:spPr>
+        <p:txBody>
+          <a:bodyPr/>
+          <a:p/>
+        </p:txBody>
       </p:sp>
       <p:sp>
         <p:nvSpPr>
@@ -22952,6 +23880,10 @@
             <a:prstDash val="solid"/>
           </a:ln>
         </p:spPr>
+        <p:txBody>
+          <a:bodyPr/>
+          <a:p/>
+        </p:txBody>
       </p:sp>
       <p:sp>
         <p:nvSpPr>
@@ -23057,6 +23989,10 @@
             <a:prstDash val="solid"/>
           </a:ln>
         </p:spPr>
+        <p:txBody>
+          <a:bodyPr/>
+          <a:p/>
+        </p:txBody>
       </p:sp>
       <p:sp>
         <p:nvSpPr>
@@ -23175,6 +24111,30 @@
           </a:p>
         </p:txBody>
       </p:sp>
+      <p:pic>
+        <p:nvPicPr>
+          <p:cNvPr id="32" name="IE University logo" descr="IE University, School of Science &amp; Technology"/>
+          <p:cNvPicPr>
+            <a:picLocks noChangeAspect="1"/>
+          </p:cNvPicPr>
+          <p:nvPr/>
+        </p:nvPicPr>
+        <p:blipFill>
+          <a:blip r:embed="rId3"/>
+          <a:stretch>
+            <a:fillRect/>
+          </a:stretch>
+        </p:blipFill>
+        <p:spPr>
+          <a:xfrm>
+            <a:off x="8013607" y="92634"/>
+            <a:ext cx="764633" cy="262789"/>
+          </a:xfrm>
+          <a:prstGeom prst="rect">
+            <a:avLst/>
+          </a:prstGeom>
+        </p:spPr>
+      </p:pic>
     </p:spTree>
   </p:cSld>
   <p:clrMapOvr>
@@ -23240,7 +24200,7 @@
                 <a:ea typeface="Calibri" pitchFamily="34" charset="-122"/>
                 <a:cs typeface="Calibri" pitchFamily="34" charset="-120"/>
               </a:rPr>
-              <a:t>Master in Business Analytics and Big Data</a:t>
+              <a:t>Master in Business Analytics and Data Science</a:t>
             </a:r>
             <a:endParaRPr lang="en-US" sz="900" dirty="0"/>
           </a:p>
@@ -23279,7 +24239,7 @@
                 <a:ea typeface="Calibri" pitchFamily="34" charset="-122"/>
                 <a:cs typeface="Calibri" pitchFamily="34" charset="-120"/>
               </a:rPr>
-              <a:t>MLOps · MBABD-PT 2026–27 · Session 7 · Juan Ramírez</a:t>
+              <a:t>MLOps · MBDS-PT2026F · Session 7 · Juan Ramírez</a:t>
             </a:r>
             <a:endParaRPr lang="en-US" sz="800" dirty="0"/>
           </a:p>
@@ -23389,6 +24349,10 @@
             <a:prstDash val="solid"/>
           </a:ln>
         </p:spPr>
+        <p:txBody>
+          <a:bodyPr/>
+          <a:p/>
+        </p:txBody>
       </p:sp>
       <p:sp>
         <p:nvSpPr>
@@ -23414,6 +24378,10 @@
             <a:prstDash val="solid"/>
           </a:ln>
         </p:spPr>
+        <p:txBody>
+          <a:bodyPr/>
+          <a:p/>
+        </p:txBody>
       </p:sp>
       <p:pic>
         <p:nvPicPr>
@@ -23610,6 +24578,10 @@
             <a:prstDash val="solid"/>
           </a:ln>
         </p:spPr>
+        <p:txBody>
+          <a:bodyPr/>
+          <a:p/>
+        </p:txBody>
       </p:sp>
       <p:sp>
         <p:nvSpPr>
@@ -23635,6 +24607,10 @@
             <a:prstDash val="solid"/>
           </a:ln>
         </p:spPr>
+        <p:txBody>
+          <a:bodyPr/>
+          <a:p/>
+        </p:txBody>
       </p:sp>
       <p:pic>
         <p:nvPicPr>
@@ -23852,6 +24828,10 @@
             <a:prstDash val="solid"/>
           </a:ln>
         </p:spPr>
+        <p:txBody>
+          <a:bodyPr/>
+          <a:p/>
+        </p:txBody>
       </p:sp>
       <p:pic>
         <p:nvPicPr>
@@ -23916,6 +24896,30 @@
           </a:p>
         </p:txBody>
       </p:sp>
+      <p:pic>
+        <p:nvPicPr>
+          <p:cNvPr id="20" name="IE University logo" descr="IE University, School of Science &amp; Technology"/>
+          <p:cNvPicPr>
+            <a:picLocks noChangeAspect="1"/>
+          </p:cNvPicPr>
+          <p:nvPr/>
+        </p:nvPicPr>
+        <p:blipFill>
+          <a:blip r:embed="rId6"/>
+          <a:stretch>
+            <a:fillRect/>
+          </a:stretch>
+        </p:blipFill>
+        <p:spPr>
+          <a:xfrm>
+            <a:off x="8013607" y="92634"/>
+            <a:ext cx="764633" cy="262789"/>
+          </a:xfrm>
+          <a:prstGeom prst="rect">
+            <a:avLst/>
+          </a:prstGeom>
+        </p:spPr>
+      </p:pic>
     </p:spTree>
   </p:cSld>
   <p:clrMapOvr>
@@ -23981,7 +24985,7 @@
                 <a:ea typeface="Calibri" pitchFamily="34" charset="-122"/>
                 <a:cs typeface="Calibri" pitchFamily="34" charset="-120"/>
               </a:rPr>
-              <a:t>Master in Business Analytics and Big Data</a:t>
+              <a:t>Master in Business Analytics and Data Science</a:t>
             </a:r>
             <a:endParaRPr lang="en-US" sz="900" dirty="0"/>
           </a:p>
@@ -24020,7 +25024,7 @@
                 <a:ea typeface="Calibri" pitchFamily="34" charset="-122"/>
                 <a:cs typeface="Calibri" pitchFamily="34" charset="-120"/>
               </a:rPr>
-              <a:t>MLOps · MBABD-PT 2026–27 · Session 7 · Juan Ramírez</a:t>
+              <a:t>MLOps · MBDS-PT2026F · Session 7 · Juan Ramírez</a:t>
             </a:r>
             <a:endParaRPr lang="en-US" sz="800" dirty="0"/>
           </a:p>
@@ -24169,6 +25173,10 @@
             <a:prstDash val="solid"/>
           </a:ln>
         </p:spPr>
+        <p:txBody>
+          <a:bodyPr/>
+          <a:p/>
+        </p:txBody>
       </p:sp>
       <p:sp>
         <p:nvSpPr>
@@ -24311,6 +25319,10 @@
             <a:prstDash val="solid"/>
           </a:ln>
         </p:spPr>
+        <p:txBody>
+          <a:bodyPr/>
+          <a:p/>
+        </p:txBody>
       </p:sp>
       <p:sp>
         <p:nvSpPr>
@@ -24453,6 +25465,10 @@
             <a:prstDash val="solid"/>
           </a:ln>
         </p:spPr>
+        <p:txBody>
+          <a:bodyPr/>
+          <a:p/>
+        </p:txBody>
       </p:sp>
       <p:sp>
         <p:nvSpPr>
@@ -24595,6 +25611,10 @@
             <a:prstDash val="solid"/>
           </a:ln>
         </p:spPr>
+        <p:txBody>
+          <a:bodyPr/>
+          <a:p/>
+        </p:txBody>
       </p:sp>
       <p:sp>
         <p:nvSpPr>
@@ -24737,6 +25757,10 @@
             <a:prstDash val="solid"/>
           </a:ln>
         </p:spPr>
+        <p:txBody>
+          <a:bodyPr/>
+          <a:p/>
+        </p:txBody>
       </p:sp>
       <p:sp>
         <p:nvSpPr>
@@ -24879,6 +25903,10 @@
             <a:prstDash val="solid"/>
           </a:ln>
         </p:spPr>
+        <p:txBody>
+          <a:bodyPr/>
+          <a:p/>
+        </p:txBody>
       </p:sp>
       <p:sp>
         <p:nvSpPr>
@@ -24997,6 +26025,30 @@
           </a:p>
         </p:txBody>
       </p:sp>
+      <p:pic>
+        <p:nvPicPr>
+          <p:cNvPr id="32" name="IE University logo" descr="IE University, School of Science &amp; Technology"/>
+          <p:cNvPicPr>
+            <a:picLocks noChangeAspect="1"/>
+          </p:cNvPicPr>
+          <p:nvPr/>
+        </p:nvPicPr>
+        <p:blipFill>
+          <a:blip r:embed="rId3"/>
+          <a:stretch>
+            <a:fillRect/>
+          </a:stretch>
+        </p:blipFill>
+        <p:spPr>
+          <a:xfrm>
+            <a:off x="8013607" y="92634"/>
+            <a:ext cx="764633" cy="262789"/>
+          </a:xfrm>
+          <a:prstGeom prst="rect">
+            <a:avLst/>
+          </a:prstGeom>
+        </p:spPr>
+      </p:pic>
     </p:spTree>
   </p:cSld>
   <p:clrMapOvr>
@@ -25062,7 +26114,7 @@
                 <a:ea typeface="Calibri" pitchFamily="34" charset="-122"/>
                 <a:cs typeface="Calibri" pitchFamily="34" charset="-120"/>
               </a:rPr>
-              <a:t>Master in Business Analytics and Big Data</a:t>
+              <a:t>Master in Business Analytics and Data Science</a:t>
             </a:r>
             <a:endParaRPr lang="en-US" sz="900" dirty="0"/>
           </a:p>
@@ -25101,7 +26153,7 @@
                 <a:ea typeface="Calibri" pitchFamily="34" charset="-122"/>
                 <a:cs typeface="Calibri" pitchFamily="34" charset="-120"/>
               </a:rPr>
-              <a:t>MLOps · MBABD-PT 2026–27 · Session 7 · Juan Ramírez</a:t>
+              <a:t>MLOps · MBDS-PT2026F · Session 7 · Juan Ramírez</a:t>
             </a:r>
             <a:endParaRPr lang="en-US" sz="800" dirty="0"/>
           </a:p>
@@ -25359,6 +26411,10 @@
             <a:prstDash val="solid"/>
           </a:ln>
         </p:spPr>
+        <p:txBody>
+          <a:bodyPr/>
+          <a:p/>
+        </p:txBody>
       </p:sp>
       <p:sp>
         <p:nvSpPr>
@@ -25547,6 +26603,30 @@
           </a:p>
         </p:txBody>
       </p:sp>
+      <p:pic>
+        <p:nvPicPr>
+          <p:cNvPr id="11" name="IE University logo" descr="IE University, School of Science &amp; Technology"/>
+          <p:cNvPicPr>
+            <a:picLocks noChangeAspect="1"/>
+          </p:cNvPicPr>
+          <p:nvPr/>
+        </p:nvPicPr>
+        <p:blipFill>
+          <a:blip r:embed="rId3"/>
+          <a:stretch>
+            <a:fillRect/>
+          </a:stretch>
+        </p:blipFill>
+        <p:spPr>
+          <a:xfrm>
+            <a:off x="8013607" y="92634"/>
+            <a:ext cx="764633" cy="262789"/>
+          </a:xfrm>
+          <a:prstGeom prst="rect">
+            <a:avLst/>
+          </a:prstGeom>
+        </p:spPr>
+      </p:pic>
     </p:spTree>
   </p:cSld>
   <p:clrMapOvr>
@@ -25612,7 +26692,7 @@
                 <a:ea typeface="Calibri" pitchFamily="34" charset="-122"/>
                 <a:cs typeface="Calibri" pitchFamily="34" charset="-120"/>
               </a:rPr>
-              <a:t>Master in Business Analytics and Big Data</a:t>
+              <a:t>Master in Business Analytics and Data Science</a:t>
             </a:r>
             <a:endParaRPr lang="en-US" sz="900" dirty="0"/>
           </a:p>
@@ -25651,7 +26731,7 @@
                 <a:ea typeface="Calibri" pitchFamily="34" charset="-122"/>
                 <a:cs typeface="Calibri" pitchFamily="34" charset="-120"/>
               </a:rPr>
-              <a:t>MLOps · MBABD-PT 2026–27 · Session 7 · Juan Ramírez</a:t>
+              <a:t>MLOps · MBDS-PT2026F · Session 7 · Juan Ramírez</a:t>
             </a:r>
             <a:endParaRPr lang="en-US" sz="800" dirty="0"/>
           </a:p>
@@ -26589,6 +27669,10 @@
             <a:prstDash val="solid"/>
           </a:ln>
         </p:spPr>
+        <p:txBody>
+          <a:bodyPr/>
+          <a:p/>
+        </p:txBody>
       </p:sp>
       <p:pic>
         <p:nvPicPr>
@@ -26653,6 +27737,30 @@
           </a:p>
         </p:txBody>
       </p:sp>
+      <p:pic>
+        <p:nvPicPr>
+          <p:cNvPr id="33" name="IE University logo" descr="IE University, School of Science &amp; Technology"/>
+          <p:cNvPicPr>
+            <a:picLocks noChangeAspect="1"/>
+          </p:cNvPicPr>
+          <p:nvPr/>
+        </p:nvPicPr>
+        <p:blipFill>
+          <a:blip r:embed="rId4"/>
+          <a:stretch>
+            <a:fillRect/>
+          </a:stretch>
+        </p:blipFill>
+        <p:spPr>
+          <a:xfrm>
+            <a:off x="8013607" y="92634"/>
+            <a:ext cx="764633" cy="262789"/>
+          </a:xfrm>
+          <a:prstGeom prst="rect">
+            <a:avLst/>
+          </a:prstGeom>
+        </p:spPr>
+      </p:pic>
     </p:spTree>
   </p:cSld>
   <p:clrMapOvr>
@@ -26718,7 +27826,7 @@
                 <a:ea typeface="Calibri" pitchFamily="34" charset="-122"/>
                 <a:cs typeface="Calibri" pitchFamily="34" charset="-120"/>
               </a:rPr>
-              <a:t>Master in Business Analytics and Big Data</a:t>
+              <a:t>Master in Business Analytics and Data Science</a:t>
             </a:r>
             <a:endParaRPr lang="en-US" sz="900" dirty="0"/>
           </a:p>
@@ -26757,7 +27865,7 @@
                 <a:ea typeface="Calibri" pitchFamily="34" charset="-122"/>
                 <a:cs typeface="Calibri" pitchFamily="34" charset="-120"/>
               </a:rPr>
-              <a:t>MLOps · MBABD-PT 2026–27 · Session 7 · Juan Ramírez</a:t>
+              <a:t>MLOps · MBDS-PT2026F · Session 7 · Juan Ramírez</a:t>
             </a:r>
             <a:endParaRPr lang="en-US" sz="800" dirty="0"/>
           </a:p>
@@ -26865,6 +27973,10 @@
             <a:prstDash val="solid"/>
           </a:ln>
         </p:spPr>
+        <p:txBody>
+          <a:bodyPr/>
+          <a:p/>
+        </p:txBody>
       </p:sp>
       <p:sp>
         <p:nvSpPr>
@@ -27007,6 +28119,10 @@
             <a:prstDash val="solid"/>
           </a:ln>
         </p:spPr>
+        <p:txBody>
+          <a:bodyPr/>
+          <a:p/>
+        </p:txBody>
       </p:sp>
       <p:sp>
         <p:nvSpPr>
@@ -27149,6 +28265,10 @@
             <a:prstDash val="solid"/>
           </a:ln>
         </p:spPr>
+        <p:txBody>
+          <a:bodyPr/>
+          <a:p/>
+        </p:txBody>
       </p:sp>
       <p:sp>
         <p:nvSpPr>
@@ -27267,6 +28387,30 @@
           </a:p>
         </p:txBody>
       </p:sp>
+      <p:pic>
+        <p:nvPicPr>
+          <p:cNvPr id="19" name="IE University logo" descr="IE University, School of Science &amp; Technology"/>
+          <p:cNvPicPr>
+            <a:picLocks noChangeAspect="1"/>
+          </p:cNvPicPr>
+          <p:nvPr/>
+        </p:nvPicPr>
+        <p:blipFill>
+          <a:blip r:embed="rId3"/>
+          <a:stretch>
+            <a:fillRect/>
+          </a:stretch>
+        </p:blipFill>
+        <p:spPr>
+          <a:xfrm>
+            <a:off x="8013607" y="92634"/>
+            <a:ext cx="764633" cy="262789"/>
+          </a:xfrm>
+          <a:prstGeom prst="rect">
+            <a:avLst/>
+          </a:prstGeom>
+        </p:spPr>
+      </p:pic>
     </p:spTree>
   </p:cSld>
   <p:clrMapOvr>
@@ -27332,7 +28476,7 @@
                 <a:ea typeface="Calibri" pitchFamily="34" charset="-122"/>
                 <a:cs typeface="Calibri" pitchFamily="34" charset="-120"/>
               </a:rPr>
-              <a:t>Master in Business Analytics and Big Data</a:t>
+              <a:t>Master in Business Analytics and Data Science</a:t>
             </a:r>
             <a:endParaRPr lang="en-US" sz="900" dirty="0"/>
           </a:p>
@@ -27371,7 +28515,7 @@
                 <a:ea typeface="Calibri" pitchFamily="34" charset="-122"/>
                 <a:cs typeface="Calibri" pitchFamily="34" charset="-120"/>
               </a:rPr>
-              <a:t>MLOps · MBABD-PT 2026–27 · Session 7 · Juan Ramírez</a:t>
+              <a:t>MLOps · MBDS-PT2026F · Session 7 · Juan Ramírez</a:t>
             </a:r>
             <a:endParaRPr lang="en-US" sz="800" dirty="0"/>
           </a:p>
@@ -27479,6 +28623,10 @@
             <a:prstDash val="solid"/>
           </a:ln>
         </p:spPr>
+        <p:txBody>
+          <a:bodyPr/>
+          <a:p/>
+        </p:txBody>
       </p:sp>
       <p:sp>
         <p:nvSpPr>
@@ -27582,6 +28730,10 @@
             <a:prstDash val="solid"/>
           </a:ln>
         </p:spPr>
+        <p:txBody>
+          <a:bodyPr/>
+          <a:p/>
+        </p:txBody>
       </p:sp>
       <p:sp>
         <p:nvSpPr>
@@ -27685,6 +28837,10 @@
             <a:prstDash val="solid"/>
           </a:ln>
         </p:spPr>
+        <p:txBody>
+          <a:bodyPr/>
+          <a:p/>
+        </p:txBody>
       </p:sp>
       <p:sp>
         <p:nvSpPr>
@@ -27790,6 +28946,10 @@
             <a:prstDash val="solid"/>
           </a:ln>
         </p:spPr>
+        <p:txBody>
+          <a:bodyPr/>
+          <a:p/>
+        </p:txBody>
       </p:sp>
       <p:pic>
         <p:nvPicPr>
@@ -27868,6 +29028,30 @@
           </a:p>
         </p:txBody>
       </p:sp>
+      <p:pic>
+        <p:nvPicPr>
+          <p:cNvPr id="19" name="IE University logo" descr="IE University, School of Science &amp; Technology"/>
+          <p:cNvPicPr>
+            <a:picLocks noChangeAspect="1"/>
+          </p:cNvPicPr>
+          <p:nvPr/>
+        </p:nvPicPr>
+        <p:blipFill>
+          <a:blip r:embed="rId4"/>
+          <a:stretch>
+            <a:fillRect/>
+          </a:stretch>
+        </p:blipFill>
+        <p:spPr>
+          <a:xfrm>
+            <a:off x="8013607" y="92634"/>
+            <a:ext cx="764633" cy="262789"/>
+          </a:xfrm>
+          <a:prstGeom prst="rect">
+            <a:avLst/>
+          </a:prstGeom>
+        </p:spPr>
+      </p:pic>
     </p:spTree>
   </p:cSld>
   <p:clrMapOvr>
@@ -27933,7 +29117,7 @@
                 <a:ea typeface="Calibri" pitchFamily="34" charset="-122"/>
                 <a:cs typeface="Calibri" pitchFamily="34" charset="-120"/>
               </a:rPr>
-              <a:t>Master in Business Analytics and Big Data</a:t>
+              <a:t>Master in Business Analytics and Data Science</a:t>
             </a:r>
             <a:endParaRPr lang="en-US" sz="900" dirty="0"/>
           </a:p>
@@ -27972,7 +29156,7 @@
                 <a:ea typeface="Calibri" pitchFamily="34" charset="-122"/>
                 <a:cs typeface="Calibri" pitchFamily="34" charset="-120"/>
               </a:rPr>
-              <a:t>MLOps · MBABD-PT 2026–27 · Session 7 · Juan Ramírez</a:t>
+              <a:t>MLOps · MBDS-PT2026F · Session 7 · Juan Ramírez</a:t>
             </a:r>
             <a:endParaRPr lang="en-US" sz="800" dirty="0"/>
           </a:p>
@@ -28082,6 +29266,10 @@
             <a:prstDash val="solid"/>
           </a:ln>
         </p:spPr>
+        <p:txBody>
+          <a:bodyPr/>
+          <a:p/>
+        </p:txBody>
       </p:sp>
       <p:sp>
         <p:nvSpPr>
@@ -28107,6 +29295,10 @@
             <a:prstDash val="solid"/>
           </a:ln>
         </p:spPr>
+        <p:txBody>
+          <a:bodyPr/>
+          <a:p/>
+        </p:txBody>
       </p:sp>
       <p:pic>
         <p:nvPicPr>
@@ -28261,6 +29453,10 @@
             <a:prstDash val="solid"/>
           </a:ln>
         </p:spPr>
+        <p:txBody>
+          <a:bodyPr/>
+          <a:p/>
+        </p:txBody>
       </p:sp>
       <p:sp>
         <p:nvSpPr>
@@ -28286,6 +29482,10 @@
             <a:prstDash val="solid"/>
           </a:ln>
         </p:spPr>
+        <p:txBody>
+          <a:bodyPr/>
+          <a:p/>
+        </p:txBody>
       </p:sp>
       <p:pic>
         <p:nvPicPr>
@@ -28461,6 +29661,10 @@
             <a:prstDash val="solid"/>
           </a:ln>
         </p:spPr>
+        <p:txBody>
+          <a:bodyPr/>
+          <a:p/>
+        </p:txBody>
       </p:sp>
       <p:sp>
         <p:nvSpPr>
@@ -28540,6 +29744,30 @@
           </a:p>
         </p:txBody>
       </p:sp>
+      <p:pic>
+        <p:nvPicPr>
+          <p:cNvPr id="20" name="IE University logo" descr="IE University, School of Science &amp; Technology"/>
+          <p:cNvPicPr>
+            <a:picLocks noChangeAspect="1"/>
+          </p:cNvPicPr>
+          <p:nvPr/>
+        </p:nvPicPr>
+        <p:blipFill>
+          <a:blip r:embed="rId5"/>
+          <a:stretch>
+            <a:fillRect/>
+          </a:stretch>
+        </p:blipFill>
+        <p:spPr>
+          <a:xfrm>
+            <a:off x="8013607" y="92634"/>
+            <a:ext cx="764633" cy="262789"/>
+          </a:xfrm>
+          <a:prstGeom prst="rect">
+            <a:avLst/>
+          </a:prstGeom>
+        </p:spPr>
+      </p:pic>
     </p:spTree>
   </p:cSld>
   <p:clrMapOvr>
@@ -28605,7 +29833,7 @@
                 <a:ea typeface="Calibri" pitchFamily="34" charset="-122"/>
                 <a:cs typeface="Calibri" pitchFamily="34" charset="-120"/>
               </a:rPr>
-              <a:t>Master in Business Analytics and Big Data</a:t>
+              <a:t>Master in Business Analytics and Data Science</a:t>
             </a:r>
             <a:endParaRPr lang="en-US" sz="900" dirty="0"/>
           </a:p>
@@ -28644,7 +29872,7 @@
                 <a:ea typeface="Calibri" pitchFamily="34" charset="-122"/>
                 <a:cs typeface="Calibri" pitchFamily="34" charset="-120"/>
               </a:rPr>
-              <a:t>MLOps · MBABD-PT 2026–27 · Session 7 · Juan Ramírez</a:t>
+              <a:t>MLOps · MBDS-PT2026F · Session 7 · Juan Ramírez</a:t>
             </a:r>
             <a:endParaRPr lang="en-US" sz="800" dirty="0"/>
           </a:p>
@@ -28767,6 +29995,30 @@
           </a:p>
         </p:txBody>
       </p:sp>
+      <p:pic>
+        <p:nvPicPr>
+          <p:cNvPr id="7" name="IE University logo" descr="IE University, School of Science &amp; Technology"/>
+          <p:cNvPicPr>
+            <a:picLocks noChangeAspect="1"/>
+          </p:cNvPicPr>
+          <p:nvPr/>
+        </p:nvPicPr>
+        <p:blipFill>
+          <a:blip r:embed="rId3"/>
+          <a:stretch>
+            <a:fillRect/>
+          </a:stretch>
+        </p:blipFill>
+        <p:spPr>
+          <a:xfrm>
+            <a:off x="8252653" y="109728"/>
+            <a:ext cx="525587" cy="704395"/>
+          </a:xfrm>
+          <a:prstGeom prst="rect">
+            <a:avLst/>
+          </a:prstGeom>
+        </p:spPr>
+      </p:pic>
     </p:spTree>
   </p:cSld>
   <p:clrMapOvr>
@@ -28832,7 +30084,7 @@
                 <a:ea typeface="Calibri" pitchFamily="34" charset="-122"/>
                 <a:cs typeface="Calibri" pitchFamily="34" charset="-120"/>
               </a:rPr>
-              <a:t>Master in Business Analytics and Big Data</a:t>
+              <a:t>Master in Business Analytics and Data Science</a:t>
             </a:r>
             <a:endParaRPr lang="en-US" sz="900" dirty="0"/>
           </a:p>
@@ -28871,7 +30123,7 @@
                 <a:ea typeface="Calibri" pitchFamily="34" charset="-122"/>
                 <a:cs typeface="Calibri" pitchFamily="34" charset="-120"/>
               </a:rPr>
-              <a:t>MLOps · MBABD-PT 2026–27 · Session 7 · Juan Ramírez</a:t>
+              <a:t>MLOps · MBDS-PT2026F · Session 7 · Juan Ramírez</a:t>
             </a:r>
             <a:endParaRPr lang="en-US" sz="800" dirty="0"/>
           </a:p>
@@ -28981,6 +30233,10 @@
             <a:prstDash val="solid"/>
           </a:ln>
         </p:spPr>
+        <p:txBody>
+          <a:bodyPr/>
+          <a:p/>
+        </p:txBody>
       </p:sp>
       <p:sp>
         <p:nvSpPr>
@@ -29006,6 +30262,10 @@
             <a:prstDash val="solid"/>
           </a:ln>
         </p:spPr>
+        <p:txBody>
+          <a:bodyPr/>
+          <a:p/>
+        </p:txBody>
       </p:sp>
       <p:pic>
         <p:nvPicPr>
@@ -29202,6 +30462,10 @@
             <a:prstDash val="solid"/>
           </a:ln>
         </p:spPr>
+        <p:txBody>
+          <a:bodyPr/>
+          <a:p/>
+        </p:txBody>
       </p:sp>
       <p:sp>
         <p:nvSpPr>
@@ -29227,6 +30491,10 @@
             <a:prstDash val="solid"/>
           </a:ln>
         </p:spPr>
+        <p:txBody>
+          <a:bodyPr/>
+          <a:p/>
+        </p:txBody>
       </p:sp>
       <p:pic>
         <p:nvPicPr>
@@ -29423,6 +30691,10 @@
             <a:prstDash val="solid"/>
           </a:ln>
         </p:spPr>
+        <p:txBody>
+          <a:bodyPr/>
+          <a:p/>
+        </p:txBody>
       </p:sp>
       <p:pic>
         <p:nvPicPr>
@@ -29487,6 +30759,30 @@
           </a:p>
         </p:txBody>
       </p:sp>
+      <p:pic>
+        <p:nvPicPr>
+          <p:cNvPr id="20" name="IE University logo" descr="IE University, School of Science &amp; Technology"/>
+          <p:cNvPicPr>
+            <a:picLocks noChangeAspect="1"/>
+          </p:cNvPicPr>
+          <p:nvPr/>
+        </p:nvPicPr>
+        <p:blipFill>
+          <a:blip r:embed="rId6"/>
+          <a:stretch>
+            <a:fillRect/>
+          </a:stretch>
+        </p:blipFill>
+        <p:spPr>
+          <a:xfrm>
+            <a:off x="8013607" y="92634"/>
+            <a:ext cx="764633" cy="262789"/>
+          </a:xfrm>
+          <a:prstGeom prst="rect">
+            <a:avLst/>
+          </a:prstGeom>
+        </p:spPr>
+      </p:pic>
     </p:spTree>
   </p:cSld>
   <p:clrMapOvr>
@@ -29552,7 +30848,7 @@
                 <a:ea typeface="Calibri" pitchFamily="34" charset="-122"/>
                 <a:cs typeface="Calibri" pitchFamily="34" charset="-120"/>
               </a:rPr>
-              <a:t>Master in Business Analytics and Big Data</a:t>
+              <a:t>Master in Business Analytics and Data Science</a:t>
             </a:r>
             <a:endParaRPr lang="en-US" sz="900" dirty="0"/>
           </a:p>
@@ -29591,7 +30887,7 @@
                 <a:ea typeface="Calibri" pitchFamily="34" charset="-122"/>
                 <a:cs typeface="Calibri" pitchFamily="34" charset="-120"/>
               </a:rPr>
-              <a:t>MLOps · MBABD-PT 2026–27 · Session 7 · Juan Ramírez</a:t>
+              <a:t>MLOps · MBDS-PT2026F · Session 7 · Juan Ramírez</a:t>
             </a:r>
             <a:endParaRPr lang="en-US" sz="800" dirty="0"/>
           </a:p>
@@ -29699,6 +30995,10 @@
             <a:prstDash val="solid"/>
           </a:ln>
         </p:spPr>
+        <p:txBody>
+          <a:bodyPr/>
+          <a:p/>
+        </p:txBody>
       </p:sp>
       <p:sp>
         <p:nvSpPr>
@@ -29841,6 +31141,10 @@
             <a:prstDash val="solid"/>
           </a:ln>
         </p:spPr>
+        <p:txBody>
+          <a:bodyPr/>
+          <a:p/>
+        </p:txBody>
       </p:sp>
       <p:sp>
         <p:nvSpPr>
@@ -29983,6 +31287,10 @@
             <a:prstDash val="solid"/>
           </a:ln>
         </p:spPr>
+        <p:txBody>
+          <a:bodyPr/>
+          <a:p/>
+        </p:txBody>
       </p:sp>
       <p:sp>
         <p:nvSpPr>
@@ -30101,6 +31409,30 @@
           </a:p>
         </p:txBody>
       </p:sp>
+      <p:pic>
+        <p:nvPicPr>
+          <p:cNvPr id="19" name="IE University logo" descr="IE University, School of Science &amp; Technology"/>
+          <p:cNvPicPr>
+            <a:picLocks noChangeAspect="1"/>
+          </p:cNvPicPr>
+          <p:nvPr/>
+        </p:nvPicPr>
+        <p:blipFill>
+          <a:blip r:embed="rId3"/>
+          <a:stretch>
+            <a:fillRect/>
+          </a:stretch>
+        </p:blipFill>
+        <p:spPr>
+          <a:xfrm>
+            <a:off x="8013607" y="92634"/>
+            <a:ext cx="764633" cy="262789"/>
+          </a:xfrm>
+          <a:prstGeom prst="rect">
+            <a:avLst/>
+          </a:prstGeom>
+        </p:spPr>
+      </p:pic>
     </p:spTree>
   </p:cSld>
   <p:clrMapOvr>
@@ -30166,7 +31498,7 @@
                 <a:ea typeface="Calibri" pitchFamily="34" charset="-122"/>
                 <a:cs typeface="Calibri" pitchFamily="34" charset="-120"/>
               </a:rPr>
-              <a:t>Master in Business Analytics and Big Data</a:t>
+              <a:t>Master in Business Analytics and Data Science</a:t>
             </a:r>
             <a:endParaRPr lang="en-US" sz="900" dirty="0"/>
           </a:p>
@@ -30205,7 +31537,7 @@
                 <a:ea typeface="Calibri" pitchFamily="34" charset="-122"/>
                 <a:cs typeface="Calibri" pitchFamily="34" charset="-120"/>
               </a:rPr>
-              <a:t>MLOps · MBABD-PT 2026–27 · Session 7 · Juan Ramírez</a:t>
+              <a:t>MLOps · MBDS-PT2026F · Session 7 · Juan Ramírez</a:t>
             </a:r>
             <a:endParaRPr lang="en-US" sz="800" dirty="0"/>
           </a:p>
@@ -30315,6 +31647,10 @@
             <a:prstDash val="solid"/>
           </a:ln>
         </p:spPr>
+        <p:txBody>
+          <a:bodyPr/>
+          <a:p/>
+        </p:txBody>
       </p:sp>
       <p:sp>
         <p:nvSpPr>
@@ -30340,6 +31676,10 @@
             <a:prstDash val="solid"/>
           </a:ln>
         </p:spPr>
+        <p:txBody>
+          <a:bodyPr/>
+          <a:p/>
+        </p:txBody>
       </p:sp>
       <p:pic>
         <p:nvPicPr>
@@ -30536,6 +31876,10 @@
             <a:prstDash val="solid"/>
           </a:ln>
         </p:spPr>
+        <p:txBody>
+          <a:bodyPr/>
+          <a:p/>
+        </p:txBody>
       </p:sp>
       <p:sp>
         <p:nvSpPr>
@@ -30561,6 +31905,10 @@
             <a:prstDash val="solid"/>
           </a:ln>
         </p:spPr>
+        <p:txBody>
+          <a:bodyPr/>
+          <a:p/>
+        </p:txBody>
       </p:sp>
       <p:pic>
         <p:nvPicPr>
@@ -30770,6 +32118,30 @@
           </a:p>
         </p:txBody>
       </p:sp>
+      <p:pic>
+        <p:nvPicPr>
+          <p:cNvPr id="18" name="IE University logo" descr="IE University, School of Science &amp; Technology"/>
+          <p:cNvPicPr>
+            <a:picLocks noChangeAspect="1"/>
+          </p:cNvPicPr>
+          <p:nvPr/>
+        </p:nvPicPr>
+        <p:blipFill>
+          <a:blip r:embed="rId5"/>
+          <a:stretch>
+            <a:fillRect/>
+          </a:stretch>
+        </p:blipFill>
+        <p:spPr>
+          <a:xfrm>
+            <a:off x="8013607" y="92634"/>
+            <a:ext cx="764633" cy="262789"/>
+          </a:xfrm>
+          <a:prstGeom prst="rect">
+            <a:avLst/>
+          </a:prstGeom>
+        </p:spPr>
+      </p:pic>
     </p:spTree>
   </p:cSld>
   <p:clrMapOvr>
@@ -30835,7 +32207,7 @@
                 <a:ea typeface="Calibri" pitchFamily="34" charset="-122"/>
                 <a:cs typeface="Calibri" pitchFamily="34" charset="-120"/>
               </a:rPr>
-              <a:t>Master in Business Analytics and Big Data</a:t>
+              <a:t>Master in Business Analytics and Data Science</a:t>
             </a:r>
             <a:endParaRPr lang="en-US" sz="900" dirty="0"/>
           </a:p>
@@ -30874,7 +32246,7 @@
                 <a:ea typeface="Calibri" pitchFamily="34" charset="-122"/>
                 <a:cs typeface="Calibri" pitchFamily="34" charset="-120"/>
               </a:rPr>
-              <a:t>MLOps · MBABD-PT 2026–27 · Session 7 · Juan Ramírez</a:t>
+              <a:t>MLOps · MBDS-PT2026F · Session 7 · Juan Ramírez</a:t>
             </a:r>
             <a:endParaRPr lang="en-US" sz="800" dirty="0"/>
           </a:p>
@@ -31023,6 +32395,10 @@
             <a:prstDash val="solid"/>
           </a:ln>
         </p:spPr>
+        <p:txBody>
+          <a:bodyPr/>
+          <a:p/>
+        </p:txBody>
       </p:sp>
       <p:sp>
         <p:nvSpPr>
@@ -31350,6 +32726,10 @@
             <a:prstDash val="solid"/>
           </a:ln>
         </p:spPr>
+        <p:txBody>
+          <a:bodyPr/>
+          <a:p/>
+        </p:txBody>
       </p:sp>
       <p:sp>
         <p:nvSpPr>
@@ -31660,6 +33040,10 @@
             <a:prstDash val="solid"/>
           </a:ln>
         </p:spPr>
+        <p:txBody>
+          <a:bodyPr/>
+          <a:p/>
+        </p:txBody>
       </p:sp>
       <p:pic>
         <p:nvPicPr>
@@ -31724,6 +33108,30 @@
           </a:p>
         </p:txBody>
       </p:sp>
+      <p:pic>
+        <p:nvPicPr>
+          <p:cNvPr id="16" name="IE University logo" descr="IE University, School of Science &amp; Technology"/>
+          <p:cNvPicPr>
+            <a:picLocks noChangeAspect="1"/>
+          </p:cNvPicPr>
+          <p:nvPr/>
+        </p:nvPicPr>
+        <p:blipFill>
+          <a:blip r:embed="rId4"/>
+          <a:stretch>
+            <a:fillRect/>
+          </a:stretch>
+        </p:blipFill>
+        <p:spPr>
+          <a:xfrm>
+            <a:off x="8013607" y="92634"/>
+            <a:ext cx="764633" cy="262789"/>
+          </a:xfrm>
+          <a:prstGeom prst="rect">
+            <a:avLst/>
+          </a:prstGeom>
+        </p:spPr>
+      </p:pic>
     </p:spTree>
   </p:cSld>
   <p:clrMapOvr>
@@ -31789,7 +33197,7 @@
                 <a:ea typeface="Calibri" pitchFamily="34" charset="-122"/>
                 <a:cs typeface="Calibri" pitchFamily="34" charset="-120"/>
               </a:rPr>
-              <a:t>Master in Business Analytics and Big Data</a:t>
+              <a:t>Master in Business Analytics and Data Science</a:t>
             </a:r>
             <a:endParaRPr lang="en-US" sz="900" dirty="0"/>
           </a:p>
@@ -31828,7 +33236,7 @@
                 <a:ea typeface="Calibri" pitchFamily="34" charset="-122"/>
                 <a:cs typeface="Calibri" pitchFamily="34" charset="-120"/>
               </a:rPr>
-              <a:t>MLOps · MBABD-PT 2026–27 · Session 7 · Juan Ramírez</a:t>
+              <a:t>MLOps · MBDS-PT2026F · Session 7 · Juan Ramírez</a:t>
             </a:r>
             <a:endParaRPr lang="en-US" sz="800" dirty="0"/>
           </a:p>
@@ -31938,6 +33346,10 @@
             <a:prstDash val="solid"/>
           </a:ln>
         </p:spPr>
+        <p:txBody>
+          <a:bodyPr/>
+          <a:p/>
+        </p:txBody>
       </p:sp>
       <p:sp>
         <p:nvSpPr>
@@ -31963,6 +33375,10 @@
             <a:prstDash val="solid"/>
           </a:ln>
         </p:spPr>
+        <p:txBody>
+          <a:bodyPr/>
+          <a:p/>
+        </p:txBody>
       </p:sp>
       <p:pic>
         <p:nvPicPr>
@@ -32131,6 +33547,10 @@
             <a:prstDash val="solid"/>
           </a:ln>
         </p:spPr>
+        <p:txBody>
+          <a:bodyPr/>
+          <a:p/>
+        </p:txBody>
       </p:sp>
       <p:sp>
         <p:nvSpPr>
@@ -32156,6 +33576,10 @@
             <a:prstDash val="solid"/>
           </a:ln>
         </p:spPr>
+        <p:txBody>
+          <a:bodyPr/>
+          <a:p/>
+        </p:txBody>
       </p:sp>
       <p:pic>
         <p:nvPicPr>
@@ -32324,6 +33748,10 @@
             <a:prstDash val="solid"/>
           </a:ln>
         </p:spPr>
+        <p:txBody>
+          <a:bodyPr/>
+          <a:p/>
+        </p:txBody>
       </p:sp>
       <p:sp>
         <p:nvSpPr>
@@ -32349,6 +33777,10 @@
             <a:prstDash val="solid"/>
           </a:ln>
         </p:spPr>
+        <p:txBody>
+          <a:bodyPr/>
+          <a:p/>
+        </p:txBody>
       </p:sp>
       <p:pic>
         <p:nvPicPr>
@@ -32517,6 +33949,10 @@
             <a:prstDash val="solid"/>
           </a:ln>
         </p:spPr>
+        <p:txBody>
+          <a:bodyPr/>
+          <a:p/>
+        </p:txBody>
       </p:sp>
       <p:pic>
         <p:nvPicPr>
@@ -32620,6 +34056,30 @@
           </a:p>
         </p:txBody>
       </p:sp>
+      <p:pic>
+        <p:nvPicPr>
+          <p:cNvPr id="29" name="IE University logo" descr="IE University, School of Science &amp; Technology"/>
+          <p:cNvPicPr>
+            <a:picLocks noChangeAspect="1"/>
+          </p:cNvPicPr>
+          <p:nvPr/>
+        </p:nvPicPr>
+        <p:blipFill>
+          <a:blip r:embed="rId7"/>
+          <a:stretch>
+            <a:fillRect/>
+          </a:stretch>
+        </p:blipFill>
+        <p:spPr>
+          <a:xfrm>
+            <a:off x="8013607" y="92634"/>
+            <a:ext cx="764633" cy="262789"/>
+          </a:xfrm>
+          <a:prstGeom prst="rect">
+            <a:avLst/>
+          </a:prstGeom>
+        </p:spPr>
+      </p:pic>
     </p:spTree>
   </p:cSld>
   <p:clrMapOvr>
@@ -32685,7 +34145,7 @@
                 <a:ea typeface="Calibri" pitchFamily="34" charset="-122"/>
                 <a:cs typeface="Calibri" pitchFamily="34" charset="-120"/>
               </a:rPr>
-              <a:t>Master in Business Analytics and Big Data</a:t>
+              <a:t>Master in Business Analytics and Data Science</a:t>
             </a:r>
             <a:endParaRPr lang="en-US" sz="900" dirty="0"/>
           </a:p>
@@ -32724,7 +34184,7 @@
                 <a:ea typeface="Calibri" pitchFamily="34" charset="-122"/>
                 <a:cs typeface="Calibri" pitchFamily="34" charset="-120"/>
               </a:rPr>
-              <a:t>MLOps · MBABD-PT 2026–27 · Session 7 · Juan Ramírez</a:t>
+              <a:t>MLOps · MBDS-PT2026F · Session 7 · Juan Ramírez</a:t>
             </a:r>
             <a:endParaRPr lang="en-US" sz="800" dirty="0"/>
           </a:p>
@@ -32873,6 +34333,10 @@
             <a:prstDash val="solid"/>
           </a:ln>
         </p:spPr>
+        <p:txBody>
+          <a:bodyPr/>
+          <a:p/>
+        </p:txBody>
       </p:sp>
       <p:sp>
         <p:nvSpPr>
@@ -33177,6 +34641,10 @@
             <a:prstDash val="solid"/>
           </a:ln>
         </p:spPr>
+        <p:txBody>
+          <a:bodyPr/>
+          <a:p/>
+        </p:txBody>
       </p:sp>
       <p:sp>
         <p:nvSpPr>
@@ -33442,6 +34910,10 @@
             <a:prstDash val="solid"/>
           </a:ln>
         </p:spPr>
+        <p:txBody>
+          <a:bodyPr/>
+          <a:p/>
+        </p:txBody>
       </p:sp>
       <p:pic>
         <p:nvPicPr>
@@ -33506,6 +34978,30 @@
           </a:p>
         </p:txBody>
       </p:sp>
+      <p:pic>
+        <p:nvPicPr>
+          <p:cNvPr id="16" name="IE University logo" descr="IE University, School of Science &amp; Technology"/>
+          <p:cNvPicPr>
+            <a:picLocks noChangeAspect="1"/>
+          </p:cNvPicPr>
+          <p:nvPr/>
+        </p:nvPicPr>
+        <p:blipFill>
+          <a:blip r:embed="rId4"/>
+          <a:stretch>
+            <a:fillRect/>
+          </a:stretch>
+        </p:blipFill>
+        <p:spPr>
+          <a:xfrm>
+            <a:off x="8013607" y="92634"/>
+            <a:ext cx="764633" cy="262789"/>
+          </a:xfrm>
+          <a:prstGeom prst="rect">
+            <a:avLst/>
+          </a:prstGeom>
+        </p:spPr>
+      </p:pic>
     </p:spTree>
   </p:cSld>
   <p:clrMapOvr>
@@ -33571,7 +35067,7 @@
                 <a:ea typeface="Calibri" pitchFamily="34" charset="-122"/>
                 <a:cs typeface="Calibri" pitchFamily="34" charset="-120"/>
               </a:rPr>
-              <a:t>Master in Business Analytics and Big Data</a:t>
+              <a:t>Master in Business Analytics and Data Science</a:t>
             </a:r>
             <a:endParaRPr lang="en-US" sz="900" dirty="0"/>
           </a:p>
@@ -33610,7 +35106,7 @@
                 <a:ea typeface="Calibri" pitchFamily="34" charset="-122"/>
                 <a:cs typeface="Calibri" pitchFamily="34" charset="-120"/>
               </a:rPr>
-              <a:t>MLOps · MBABD-PT 2026–27 · Session 7 · Juan Ramírez</a:t>
+              <a:t>MLOps · MBDS-PT2026F · Session 7 · Juan Ramírez</a:t>
             </a:r>
             <a:endParaRPr lang="en-US" sz="800" dirty="0"/>
           </a:p>
@@ -33759,6 +35255,10 @@
             <a:prstDash val="solid"/>
           </a:ln>
         </p:spPr>
+        <p:txBody>
+          <a:bodyPr/>
+          <a:p/>
+        </p:txBody>
       </p:sp>
       <p:sp>
         <p:nvSpPr>
@@ -33825,6 +35325,10 @@
             <a:prstDash val="solid"/>
           </a:ln>
         </p:spPr>
+        <p:txBody>
+          <a:bodyPr/>
+          <a:p/>
+        </p:txBody>
       </p:sp>
       <p:sp>
         <p:nvSpPr>
@@ -33891,6 +35395,10 @@
             <a:prstDash val="solid"/>
           </a:ln>
         </p:spPr>
+        <p:txBody>
+          <a:bodyPr/>
+          <a:p/>
+        </p:txBody>
       </p:sp>
       <p:sp>
         <p:nvSpPr>
@@ -33957,6 +35465,10 @@
             <a:prstDash val="solid"/>
           </a:ln>
         </p:spPr>
+        <p:txBody>
+          <a:bodyPr/>
+          <a:p/>
+        </p:txBody>
       </p:sp>
       <p:sp>
         <p:nvSpPr>
@@ -34023,6 +35535,10 @@
             <a:prstDash val="solid"/>
           </a:ln>
         </p:spPr>
+        <p:txBody>
+          <a:bodyPr/>
+          <a:p/>
+        </p:txBody>
       </p:sp>
       <p:sp>
         <p:nvSpPr>
@@ -34089,6 +35605,10 @@
             <a:prstDash val="solid"/>
           </a:ln>
         </p:spPr>
+        <p:txBody>
+          <a:bodyPr/>
+          <a:p/>
+        </p:txBody>
       </p:sp>
       <p:sp>
         <p:nvSpPr>
@@ -34155,6 +35675,10 @@
             <a:prstDash val="solid"/>
           </a:ln>
         </p:spPr>
+        <p:txBody>
+          <a:bodyPr/>
+          <a:p/>
+        </p:txBody>
       </p:sp>
       <p:sp>
         <p:nvSpPr>
@@ -34221,6 +35745,10 @@
             <a:prstDash val="solid"/>
           </a:ln>
         </p:spPr>
+        <p:txBody>
+          <a:bodyPr/>
+          <a:p/>
+        </p:txBody>
       </p:sp>
       <p:sp>
         <p:nvSpPr>
@@ -34287,6 +35815,10 @@
             <a:prstDash val="solid"/>
           </a:ln>
         </p:spPr>
+        <p:txBody>
+          <a:bodyPr/>
+          <a:p/>
+        </p:txBody>
       </p:sp>
       <p:sp>
         <p:nvSpPr>
@@ -34366,6 +35898,30 @@
           </a:p>
         </p:txBody>
       </p:sp>
+      <p:pic>
+        <p:nvPicPr>
+          <p:cNvPr id="26" name="IE University logo" descr="IE University, School of Science &amp; Technology"/>
+          <p:cNvPicPr>
+            <a:picLocks noChangeAspect="1"/>
+          </p:cNvPicPr>
+          <p:nvPr/>
+        </p:nvPicPr>
+        <p:blipFill>
+          <a:blip r:embed="rId3"/>
+          <a:stretch>
+            <a:fillRect/>
+          </a:stretch>
+        </p:blipFill>
+        <p:spPr>
+          <a:xfrm>
+            <a:off x="8252653" y="109728"/>
+            <a:ext cx="525587" cy="704395"/>
+          </a:xfrm>
+          <a:prstGeom prst="rect">
+            <a:avLst/>
+          </a:prstGeom>
+        </p:spPr>
+      </p:pic>
     </p:spTree>
   </p:cSld>
   <p:clrMapOvr>
@@ -34431,7 +35987,7 @@
                 <a:ea typeface="Calibri" pitchFamily="34" charset="-122"/>
                 <a:cs typeface="Calibri" pitchFamily="34" charset="-120"/>
               </a:rPr>
-              <a:t>Master in Business Analytics and Big Data</a:t>
+              <a:t>Master in Business Analytics and Data Science</a:t>
             </a:r>
             <a:endParaRPr lang="en-US" sz="900" dirty="0"/>
           </a:p>
@@ -34470,7 +36026,7 @@
                 <a:ea typeface="Calibri" pitchFamily="34" charset="-122"/>
                 <a:cs typeface="Calibri" pitchFamily="34" charset="-120"/>
               </a:rPr>
-              <a:t>MLOps · MBABD-PT 2026–27 · Session 7 · Juan Ramírez</a:t>
+              <a:t>MLOps · MBDS-PT2026F · Session 7 · Juan Ramírez</a:t>
             </a:r>
             <a:endParaRPr lang="en-US" sz="800" dirty="0"/>
           </a:p>
@@ -34580,6 +36136,10 @@
             <a:prstDash val="solid"/>
           </a:ln>
         </p:spPr>
+        <p:txBody>
+          <a:bodyPr/>
+          <a:p/>
+        </p:txBody>
       </p:sp>
       <p:sp>
         <p:nvSpPr>
@@ -34607,6 +36167,10 @@
             <a:prstDash val="solid"/>
           </a:ln>
         </p:spPr>
+        <p:txBody>
+          <a:bodyPr/>
+          <a:p/>
+        </p:txBody>
       </p:sp>
       <p:sp>
         <p:nvSpPr>
@@ -34857,6 +36421,10 @@
             <a:prstDash val="solid"/>
           </a:ln>
         </p:spPr>
+        <p:txBody>
+          <a:bodyPr/>
+          <a:p/>
+        </p:txBody>
       </p:sp>
       <p:sp>
         <p:nvSpPr>
@@ -34884,6 +36452,10 @@
             <a:prstDash val="solid"/>
           </a:ln>
         </p:spPr>
+        <p:txBody>
+          <a:bodyPr/>
+          <a:p/>
+        </p:txBody>
       </p:sp>
       <p:sp>
         <p:nvSpPr>
@@ -35134,6 +36706,10 @@
             <a:prstDash val="solid"/>
           </a:ln>
         </p:spPr>
+        <p:txBody>
+          <a:bodyPr/>
+          <a:p/>
+        </p:txBody>
       </p:sp>
       <p:sp>
         <p:nvSpPr>
@@ -35161,6 +36737,10 @@
             <a:prstDash val="solid"/>
           </a:ln>
         </p:spPr>
+        <p:txBody>
+          <a:bodyPr/>
+          <a:p/>
+        </p:txBody>
       </p:sp>
       <p:sp>
         <p:nvSpPr>
@@ -35411,6 +36991,10 @@
             <a:prstDash val="solid"/>
           </a:ln>
         </p:spPr>
+        <p:txBody>
+          <a:bodyPr/>
+          <a:p/>
+        </p:txBody>
       </p:sp>
       <p:pic>
         <p:nvPicPr>
@@ -35475,6 +37059,30 @@
           </a:p>
         </p:txBody>
       </p:sp>
+      <p:pic>
+        <p:nvPicPr>
+          <p:cNvPr id="31" name="IE University logo" descr="IE University, School of Science &amp; Technology"/>
+          <p:cNvPicPr>
+            <a:picLocks noChangeAspect="1"/>
+          </p:cNvPicPr>
+          <p:nvPr/>
+        </p:nvPicPr>
+        <p:blipFill>
+          <a:blip r:embed="rId4"/>
+          <a:stretch>
+            <a:fillRect/>
+          </a:stretch>
+        </p:blipFill>
+        <p:spPr>
+          <a:xfrm>
+            <a:off x="8013607" y="92634"/>
+            <a:ext cx="764633" cy="262789"/>
+          </a:xfrm>
+          <a:prstGeom prst="rect">
+            <a:avLst/>
+          </a:prstGeom>
+        </p:spPr>
+      </p:pic>
     </p:spTree>
   </p:cSld>
   <p:clrMapOvr>
@@ -35540,7 +37148,7 @@
                 <a:ea typeface="Calibri" pitchFamily="34" charset="-122"/>
                 <a:cs typeface="Calibri" pitchFamily="34" charset="-120"/>
               </a:rPr>
-              <a:t>Master in Business Analytics and Big Data</a:t>
+              <a:t>Master in Business Analytics and Data Science</a:t>
             </a:r>
             <a:endParaRPr lang="en-US" sz="900" dirty="0"/>
           </a:p>
@@ -35579,7 +37187,7 @@
                 <a:ea typeface="Calibri" pitchFamily="34" charset="-122"/>
                 <a:cs typeface="Calibri" pitchFamily="34" charset="-120"/>
               </a:rPr>
-              <a:t>MLOps · MBABD-PT 2026–27 · Session 7 · Juan Ramírez</a:t>
+              <a:t>MLOps · MBDS-PT2026F · Session 7 · Juan Ramírez</a:t>
             </a:r>
             <a:endParaRPr lang="en-US" sz="800" dirty="0"/>
           </a:p>
@@ -35689,6 +37297,10 @@
             <a:prstDash val="solid"/>
           </a:ln>
         </p:spPr>
+        <p:txBody>
+          <a:bodyPr/>
+          <a:p/>
+        </p:txBody>
       </p:sp>
       <p:sp>
         <p:nvSpPr>
@@ -35714,6 +37326,10 @@
             <a:prstDash val="solid"/>
           </a:ln>
         </p:spPr>
+        <p:txBody>
+          <a:bodyPr/>
+          <a:p/>
+        </p:txBody>
       </p:sp>
       <p:pic>
         <p:nvPicPr>
@@ -35889,6 +37505,10 @@
             <a:prstDash val="solid"/>
           </a:ln>
         </p:spPr>
+        <p:txBody>
+          <a:bodyPr/>
+          <a:p/>
+        </p:txBody>
       </p:sp>
       <p:sp>
         <p:nvSpPr>
@@ -35914,6 +37534,10 @@
             <a:prstDash val="solid"/>
           </a:ln>
         </p:spPr>
+        <p:txBody>
+          <a:bodyPr/>
+          <a:p/>
+        </p:txBody>
       </p:sp>
       <p:pic>
         <p:nvPicPr>
@@ -36089,6 +37713,10 @@
             <a:prstDash val="solid"/>
           </a:ln>
         </p:spPr>
+        <p:txBody>
+          <a:bodyPr/>
+          <a:p/>
+        </p:txBody>
       </p:sp>
       <p:pic>
         <p:nvPicPr>
@@ -36192,6 +37820,30 @@
           </a:p>
         </p:txBody>
       </p:sp>
+      <p:pic>
+        <p:nvPicPr>
+          <p:cNvPr id="21" name="IE University logo" descr="IE University, School of Science &amp; Technology"/>
+          <p:cNvPicPr>
+            <a:picLocks noChangeAspect="1"/>
+          </p:cNvPicPr>
+          <p:nvPr/>
+        </p:nvPicPr>
+        <p:blipFill>
+          <a:blip r:embed="rId6"/>
+          <a:stretch>
+            <a:fillRect/>
+          </a:stretch>
+        </p:blipFill>
+        <p:spPr>
+          <a:xfrm>
+            <a:off x="8013607" y="92634"/>
+            <a:ext cx="764633" cy="262789"/>
+          </a:xfrm>
+          <a:prstGeom prst="rect">
+            <a:avLst/>
+          </a:prstGeom>
+        </p:spPr>
+      </p:pic>
     </p:spTree>
   </p:cSld>
   <p:clrMapOvr>
@@ -36257,7 +37909,7 @@
                 <a:ea typeface="Calibri" pitchFamily="34" charset="-122"/>
                 <a:cs typeface="Calibri" pitchFamily="34" charset="-120"/>
               </a:rPr>
-              <a:t>Master in Business Analytics and Big Data</a:t>
+              <a:t>Master in Business Analytics and Data Science</a:t>
             </a:r>
             <a:endParaRPr lang="en-US" sz="900" dirty="0"/>
           </a:p>
@@ -36296,7 +37948,7 @@
                 <a:ea typeface="Calibri" pitchFamily="34" charset="-122"/>
                 <a:cs typeface="Calibri" pitchFamily="34" charset="-120"/>
               </a:rPr>
-              <a:t>MLOps · MBABD-PT 2026–27 · Session 7 · Juan Ramírez</a:t>
+              <a:t>MLOps · MBDS-PT2026F · Session 7 · Juan Ramírez</a:t>
             </a:r>
             <a:endParaRPr lang="en-US" sz="800" dirty="0"/>
           </a:p>
@@ -36404,6 +38056,10 @@
             <a:prstDash val="solid"/>
           </a:ln>
         </p:spPr>
+        <p:txBody>
+          <a:bodyPr/>
+          <a:p/>
+        </p:txBody>
       </p:sp>
       <p:sp>
         <p:nvSpPr>
@@ -36546,6 +38202,10 @@
             <a:prstDash val="solid"/>
           </a:ln>
         </p:spPr>
+        <p:txBody>
+          <a:bodyPr/>
+          <a:p/>
+        </p:txBody>
       </p:sp>
       <p:sp>
         <p:nvSpPr>
@@ -36688,6 +38348,10 @@
             <a:prstDash val="solid"/>
           </a:ln>
         </p:spPr>
+        <p:txBody>
+          <a:bodyPr/>
+          <a:p/>
+        </p:txBody>
       </p:sp>
       <p:sp>
         <p:nvSpPr>
@@ -36832,6 +38496,10 @@
             <a:prstDash val="solid"/>
           </a:ln>
         </p:spPr>
+        <p:txBody>
+          <a:bodyPr/>
+          <a:p/>
+        </p:txBody>
       </p:sp>
       <p:pic>
         <p:nvPicPr>
@@ -36896,6 +38564,30 @@
           </a:p>
         </p:txBody>
       </p:sp>
+      <p:pic>
+        <p:nvPicPr>
+          <p:cNvPr id="22" name="IE University logo" descr="IE University, School of Science &amp; Technology"/>
+          <p:cNvPicPr>
+            <a:picLocks noChangeAspect="1"/>
+          </p:cNvPicPr>
+          <p:nvPr/>
+        </p:nvPicPr>
+        <p:blipFill>
+          <a:blip r:embed="rId4"/>
+          <a:stretch>
+            <a:fillRect/>
+          </a:stretch>
+        </p:blipFill>
+        <p:spPr>
+          <a:xfrm>
+            <a:off x="8013607" y="92634"/>
+            <a:ext cx="764633" cy="262789"/>
+          </a:xfrm>
+          <a:prstGeom prst="rect">
+            <a:avLst/>
+          </a:prstGeom>
+        </p:spPr>
+      </p:pic>
     </p:spTree>
   </p:cSld>
   <p:clrMapOvr>
@@ -36961,7 +38653,7 @@
                 <a:ea typeface="Calibri" pitchFamily="34" charset="-122"/>
                 <a:cs typeface="Calibri" pitchFamily="34" charset="-120"/>
               </a:rPr>
-              <a:t>Master in Business Analytics and Big Data</a:t>
+              <a:t>Master in Business Analytics and Data Science</a:t>
             </a:r>
             <a:endParaRPr lang="en-US" sz="900" dirty="0"/>
           </a:p>
@@ -37000,7 +38692,7 @@
                 <a:ea typeface="Calibri" pitchFamily="34" charset="-122"/>
                 <a:cs typeface="Calibri" pitchFamily="34" charset="-120"/>
               </a:rPr>
-              <a:t>MLOps · MBABD-PT 2026–27 · Session 7 · Juan Ramírez</a:t>
+              <a:t>MLOps · MBDS-PT2026F · Session 7 · Juan Ramírez</a:t>
             </a:r>
             <a:endParaRPr lang="en-US" sz="800" dirty="0"/>
           </a:p>
@@ -37149,6 +38841,10 @@
             <a:prstDash val="solid"/>
           </a:ln>
         </p:spPr>
+        <p:txBody>
+          <a:bodyPr/>
+          <a:p/>
+        </p:txBody>
       </p:sp>
       <p:sp>
         <p:nvSpPr>
@@ -37215,6 +38911,10 @@
             <a:prstDash val="solid"/>
           </a:ln>
         </p:spPr>
+        <p:txBody>
+          <a:bodyPr/>
+          <a:p/>
+        </p:txBody>
       </p:sp>
       <p:sp>
         <p:nvSpPr>
@@ -37281,6 +38981,10 @@
             <a:prstDash val="solid"/>
           </a:ln>
         </p:spPr>
+        <p:txBody>
+          <a:bodyPr/>
+          <a:p/>
+        </p:txBody>
       </p:sp>
       <p:sp>
         <p:nvSpPr>
@@ -37347,6 +39051,10 @@
             <a:prstDash val="solid"/>
           </a:ln>
         </p:spPr>
+        <p:txBody>
+          <a:bodyPr/>
+          <a:p/>
+        </p:txBody>
       </p:sp>
       <p:sp>
         <p:nvSpPr>
@@ -37413,6 +39121,10 @@
             <a:prstDash val="solid"/>
           </a:ln>
         </p:spPr>
+        <p:txBody>
+          <a:bodyPr/>
+          <a:p/>
+        </p:txBody>
       </p:sp>
       <p:sp>
         <p:nvSpPr>
@@ -37479,6 +39191,10 @@
             <a:prstDash val="solid"/>
           </a:ln>
         </p:spPr>
+        <p:txBody>
+          <a:bodyPr/>
+          <a:p/>
+        </p:txBody>
       </p:sp>
       <p:sp>
         <p:nvSpPr>
@@ -37545,6 +39261,10 @@
             <a:prstDash val="solid"/>
           </a:ln>
         </p:spPr>
+        <p:txBody>
+          <a:bodyPr/>
+          <a:p/>
+        </p:txBody>
       </p:sp>
       <p:sp>
         <p:nvSpPr>
@@ -37611,6 +39331,10 @@
             <a:prstDash val="solid"/>
           </a:ln>
         </p:spPr>
+        <p:txBody>
+          <a:bodyPr/>
+          <a:p/>
+        </p:txBody>
       </p:sp>
       <p:sp>
         <p:nvSpPr>
@@ -37677,6 +39401,10 @@
             <a:prstDash val="solid"/>
           </a:ln>
         </p:spPr>
+        <p:txBody>
+          <a:bodyPr/>
+          <a:p/>
+        </p:txBody>
       </p:sp>
       <p:sp>
         <p:nvSpPr>
@@ -37756,6 +39484,30 @@
           </a:p>
         </p:txBody>
       </p:sp>
+      <p:pic>
+        <p:nvPicPr>
+          <p:cNvPr id="26" name="IE University logo" descr="IE University, School of Science &amp; Technology"/>
+          <p:cNvPicPr>
+            <a:picLocks noChangeAspect="1"/>
+          </p:cNvPicPr>
+          <p:nvPr/>
+        </p:nvPicPr>
+        <p:blipFill>
+          <a:blip r:embed="rId3"/>
+          <a:stretch>
+            <a:fillRect/>
+          </a:stretch>
+        </p:blipFill>
+        <p:spPr>
+          <a:xfrm>
+            <a:off x="8252653" y="109728"/>
+            <a:ext cx="525587" cy="704395"/>
+          </a:xfrm>
+          <a:prstGeom prst="rect">
+            <a:avLst/>
+          </a:prstGeom>
+        </p:spPr>
+      </p:pic>
     </p:spTree>
   </p:cSld>
   <p:clrMapOvr>

--- a/2026-27/S07/MLOps_S07_Monitoring_XAI_ResponsibleAI.pptx
+++ b/2026-27/S07/MLOps_S07_Monitoring_XAI_ResponsibleAI.pptx
@@ -15305,7 +15305,7 @@
       </p:sp>
       <p:graphicFrame>
         <p:nvGraphicFramePr>
-          <p:cNvPr id="3" name="Table 0"/>
+          <p:cNvPr id="21" name="Table 0"/>
           <p:cNvGraphicFramePr>
             <a:graphicFrameLocks noGrp="1"/>
           </p:cNvGraphicFramePr>

--- a/2026-27/S07/MLOps_S07_Monitoring_XAI_ResponsibleAI.pptx
+++ b/2026-27/S07/MLOps_S07_Monitoring_XAI_ResponsibleAI.pptx
@@ -4,6 +4,9 @@
   <p:sldMasterIdLst>
     <p:sldMasterId id="2147483648" r:id="rId1"/>
   </p:sldMasterIdLst>
+  <p:notesMasterIdLst>
+    <p:notesMasterId r:id="rId42"/>
+  </p:notesMasterIdLst>
   <p:sldIdLst>
     <p:sldId id="256" r:id="rId2"/>
     <p:sldId id="257" r:id="rId3"/>
@@ -46,9 +49,6 @@
     <p:sldId id="294" r:id="rId40"/>
     <p:sldId id="295" r:id="rId41"/>
   </p:sldIdLst>
-  <p:notesMasterIdLst>
-    <p:notesMasterId r:id="rId42"/>
-  </p:notesMasterIdLst>
   <p:sldSz cx="9144000" cy="5143500"/>
   <p:notesSz cx="5143500" cy="9144000"/>
   <p:defaultTextStyle>
@@ -168,234 +168,10 @@
           <a:chExt cx="0" cy="0"/>
         </a:xfrm>
       </p:grpSpPr>
-      <p:sp>
-        <p:nvSpPr>
-          <p:cNvPr id="2" name="Header Placeholder 1"/>
-          <p:cNvSpPr>
-            <a:spLocks noGrp="1"/>
-          </p:cNvSpPr>
-          <p:nvPr>
-            <p:ph type="hdr" sz="quarter"/>
-          </p:nvPr>
-        </p:nvSpPr>
-        <p:spPr>
-          <a:xfrm>
-            <a:off x="0" y="0"/>
-            <a:ext cx="2971800" cy="458788"/>
-          </a:xfrm>
-          <a:prstGeom prst="rect">
-            <a:avLst/>
-          </a:prstGeom>
-        </p:spPr>
-        <p:txBody>
-          <a:bodyPr vert="horz" lIns="91440" tIns="45720" rIns="91440" bIns="45720" rtlCol="0"/>
-          <a:lstStyle>
-            <a:lvl1pPr algn="l">
-              <a:defRPr sz="1200"/>
-            </a:lvl1pPr>
-          </a:lstStyle>
-          <a:p>
-            <a:endParaRPr lang="en-US"/>
-          </a:p>
-        </p:txBody>
-      </p:sp>
-      <p:sp>
-        <p:nvSpPr>
-          <p:cNvPr id="3" name="Date Placeholder 2"/>
-          <p:cNvSpPr>
-            <a:spLocks noGrp="1"/>
-          </p:cNvSpPr>
-          <p:nvPr>
-            <p:ph type="dt" idx="1"/>
-          </p:nvPr>
-        </p:nvSpPr>
-        <p:spPr>
-          <a:xfrm>
-            <a:off x="3884613" y="0"/>
-            <a:ext cx="2971800" cy="458788"/>
-          </a:xfrm>
-          <a:prstGeom prst="rect">
-            <a:avLst/>
-          </a:prstGeom>
-        </p:spPr>
-        <p:txBody>
-          <a:bodyPr vert="horz" lIns="91440" tIns="45720" rIns="91440" bIns="45720" rtlCol="0"/>
-          <a:lstStyle>
-            <a:lvl1pPr algn="r">
-              <a:defRPr sz="1200"/>
-            </a:lvl1pPr>
-          </a:lstStyle>
-          <a:p>
-            <a:fld id="{5282F153-3F37-0F45-9E97-73ACFA13230C}" type="datetimeFigureOut">
-              <a:rPr lang="en-US"/>
-              <a:t>7/23/19</a:t>
-            </a:fld>
-            <a:endParaRPr lang="en-US"/>
-          </a:p>
-        </p:txBody>
-      </p:sp>
-      <p:sp>
-        <p:nvSpPr>
-          <p:cNvPr id="4" name="Slide Image Placeholder 3"/>
-          <p:cNvSpPr>
-            <a:spLocks noGrp="1" noRot="1" noChangeAspect="1"/>
-          </p:cNvSpPr>
-          <p:nvPr>
-            <p:ph type="sldImg" idx="2"/>
-          </p:nvPr>
-        </p:nvSpPr>
-        <p:spPr>
-          <a:xfrm>
-            <a:off x="685800" y="1143000"/>
-            <a:ext cx="5486400" cy="3086100"/>
-          </a:xfrm>
-          <a:prstGeom prst="rect">
-            <a:avLst/>
-          </a:prstGeom>
-          <a:noFill/>
-          <a:ln w="12700">
-            <a:solidFill>
-              <a:prstClr val="black"/>
-            </a:solidFill>
-          </a:ln>
-        </p:spPr>
-        <p:txBody>
-          <a:bodyPr vert="horz" lIns="91440" tIns="45720" rIns="91440" bIns="45720" rtlCol="0" anchor="ctr"/>
-          <a:lstStyle/>
-          <a:p>
-            <a:endParaRPr lang="en-US"/>
-          </a:p>
-        </p:txBody>
-      </p:sp>
-      <p:sp>
-        <p:nvSpPr>
-          <p:cNvPr id="5" name="Notes Placeholder 4"/>
-          <p:cNvSpPr>
-            <a:spLocks noGrp="1"/>
-          </p:cNvSpPr>
-          <p:nvPr>
-            <p:ph type="body" sz="quarter" idx="3"/>
-          </p:nvPr>
-        </p:nvSpPr>
-        <p:spPr>
-          <a:xfrm>
-            <a:off x="685800" y="4400550"/>
-            <a:ext cx="5486400" cy="3600450"/>
-          </a:xfrm>
-          <a:prstGeom prst="rect">
-            <a:avLst/>
-          </a:prstGeom>
-        </p:spPr>
-        <p:txBody>
-          <a:bodyPr vert="horz" lIns="91440" tIns="45720" rIns="91440" bIns="45720" rtlCol="0"/>
-          <a:lstStyle/>
-          <a:p>
-            <a:pPr lvl="0"/>
-            <a:r>
-              <a:rPr lang="en-US"/>
-              <a:t>Click to edit Master text styles</a:t>
-            </a:r>
-          </a:p>
-          <a:p>
-            <a:pPr lvl="1"/>
-            <a:r>
-              <a:rPr lang="en-US"/>
-              <a:t>Second level</a:t>
-            </a:r>
-          </a:p>
-          <a:p>
-            <a:pPr lvl="2"/>
-            <a:r>
-              <a:rPr lang="en-US"/>
-              <a:t>Third level</a:t>
-            </a:r>
-          </a:p>
-          <a:p>
-            <a:pPr lvl="3"/>
-            <a:r>
-              <a:rPr lang="en-US"/>
-              <a:t>Fourth level</a:t>
-            </a:r>
-          </a:p>
-          <a:p>
-            <a:pPr lvl="4"/>
-            <a:r>
-              <a:rPr lang="en-US"/>
-              <a:t>Fifth level</a:t>
-            </a:r>
-          </a:p>
-        </p:txBody>
-      </p:sp>
-      <p:sp>
-        <p:nvSpPr>
-          <p:cNvPr id="6" name="Footer Placeholder 5"/>
-          <p:cNvSpPr>
-            <a:spLocks noGrp="1"/>
-          </p:cNvSpPr>
-          <p:nvPr>
-            <p:ph type="ftr" sz="quarter" idx="4"/>
-          </p:nvPr>
-        </p:nvSpPr>
-        <p:spPr>
-          <a:xfrm>
-            <a:off x="0" y="8685213"/>
-            <a:ext cx="2971800" cy="458787"/>
-          </a:xfrm>
-          <a:prstGeom prst="rect">
-            <a:avLst/>
-          </a:prstGeom>
-        </p:spPr>
-        <p:txBody>
-          <a:bodyPr vert="horz" lIns="91440" tIns="45720" rIns="91440" bIns="45720" rtlCol="0" anchor="b"/>
-          <a:lstStyle>
-            <a:lvl1pPr algn="l">
-              <a:defRPr sz="1200"/>
-            </a:lvl1pPr>
-          </a:lstStyle>
-          <a:p>
-            <a:endParaRPr lang="en-US"/>
-          </a:p>
-        </p:txBody>
-      </p:sp>
-      <p:sp>
-        <p:nvSpPr>
-          <p:cNvPr id="7" name="Slide Number Placeholder 6"/>
-          <p:cNvSpPr>
-            <a:spLocks noGrp="1"/>
-          </p:cNvSpPr>
-          <p:nvPr>
-            <p:ph type="sldNum" sz="quarter" idx="5"/>
-          </p:nvPr>
-        </p:nvSpPr>
-        <p:spPr>
-          <a:xfrm>
-            <a:off x="3884613" y="8685213"/>
-            <a:ext cx="2971800" cy="458787"/>
-          </a:xfrm>
-          <a:prstGeom prst="rect">
-            <a:avLst/>
-          </a:prstGeom>
-        </p:spPr>
-        <p:txBody>
-          <a:bodyPr vert="horz" lIns="91440" tIns="45720" rIns="91440" bIns="45720" rtlCol="0" anchor="b"/>
-          <a:lstStyle>
-            <a:lvl1pPr algn="r">
-              <a:defRPr sz="1200"/>
-            </a:lvl1pPr>
-          </a:lstStyle>
-          <a:p>
-            <a:fld id="{CE5E9CC1-C706-0F49-92D6-E571CC5EEA8F}" type="slidenum">
-              <a:rPr lang="en-US"/>
-              <a:t>‹#›</a:t>
-            </a:fld>
-            <a:endParaRPr lang="en-US"/>
-          </a:p>
-        </p:txBody>
-      </p:sp>
     </p:spTree>
     <p:extLst>
       <p:ext uri="{BB962C8B-B14F-4D97-AF65-F5344CB8AC3E}">
-        <p14:creationId xmlns:p14="http://schemas.microsoft.com/office/powerpoint/2010/main" val="1024086991"/>
+        <p14:creationId xmlns:p14="http://schemas.microsoft.com/office/powerpoint/2010/main" val="1133880120"/>
       </p:ext>
     </p:extLst>
   </p:cSld>
@@ -39809,4 +39585,319 @@
     </a:ext>
   </a:extLst>
 </a:theme>
+</file>
+
+<file path=ppt/theme/theme2.xml><?xml version="1.0" encoding="utf-8"?>
+<a:theme xmlns:a="http://schemas.openxmlformats.org/drawingml/2006/main" name="Office Theme">
+  <a:themeElements>
+    <a:clrScheme name="Office">
+      <a:dk1>
+        <a:sysClr val="windowText" lastClr="000000"/>
+      </a:dk1>
+      <a:lt1>
+        <a:sysClr val="window" lastClr="FFFFFF"/>
+      </a:lt1>
+      <a:dk2>
+        <a:srgbClr val="0E2841"/>
+      </a:dk2>
+      <a:lt2>
+        <a:srgbClr val="E8E8E8"/>
+      </a:lt2>
+      <a:accent1>
+        <a:srgbClr val="156082"/>
+      </a:accent1>
+      <a:accent2>
+        <a:srgbClr val="E97132"/>
+      </a:accent2>
+      <a:accent3>
+        <a:srgbClr val="196B24"/>
+      </a:accent3>
+      <a:accent4>
+        <a:srgbClr val="0F9ED5"/>
+      </a:accent4>
+      <a:accent5>
+        <a:srgbClr val="A02B93"/>
+      </a:accent5>
+      <a:accent6>
+        <a:srgbClr val="4EA72E"/>
+      </a:accent6>
+      <a:hlink>
+        <a:srgbClr val="467886"/>
+      </a:hlink>
+      <a:folHlink>
+        <a:srgbClr val="96607D"/>
+      </a:folHlink>
+    </a:clrScheme>
+    <a:fontScheme name="Office">
+      <a:majorFont>
+        <a:latin typeface="Aptos Display" panose="02110004020202020204"/>
+        <a:ea typeface=""/>
+        <a:cs typeface=""/>
+        <a:font script="Jpan" typeface="游ゴシック Light"/>
+        <a:font script="Hang" typeface="맑은 고딕"/>
+        <a:font script="Hans" typeface="等线 Light"/>
+        <a:font script="Hant" typeface="新細明體"/>
+        <a:font script="Arab" typeface="Times New Roman"/>
+        <a:font script="Hebr" typeface="Times New Roman"/>
+        <a:font script="Thai" typeface="Angsana New"/>
+        <a:font script="Ethi" typeface="Nyala"/>
+        <a:font script="Beng" typeface="Vrinda"/>
+        <a:font script="Gujr" typeface="Shruti"/>
+        <a:font script="Khmr" typeface="MoolBoran"/>
+        <a:font script="Knda" typeface="Tunga"/>
+        <a:font script="Guru" typeface="Raavi"/>
+        <a:font script="Cans" typeface="Euphemia"/>
+        <a:font script="Cher" typeface="Plantagenet Cherokee"/>
+        <a:font script="Yiii" typeface="Microsoft Yi Baiti"/>
+        <a:font script="Tibt" typeface="Microsoft Himalaya"/>
+        <a:font script="Thaa" typeface="MV Boli"/>
+        <a:font script="Deva" typeface="Mangal"/>
+        <a:font script="Telu" typeface="Gautami"/>
+        <a:font script="Taml" typeface="Latha"/>
+        <a:font script="Syrc" typeface="Estrangelo Edessa"/>
+        <a:font script="Orya" typeface="Kalinga"/>
+        <a:font script="Mlym" typeface="Kartika"/>
+        <a:font script="Laoo" typeface="DokChampa"/>
+        <a:font script="Sinh" typeface="Iskoola Pota"/>
+        <a:font script="Mong" typeface="Mongolian Baiti"/>
+        <a:font script="Viet" typeface="Times New Roman"/>
+        <a:font script="Uigh" typeface="Microsoft Uighur"/>
+        <a:font script="Geor" typeface="Sylfaen"/>
+        <a:font script="Armn" typeface="Arial"/>
+        <a:font script="Bugi" typeface="Leelawadee UI"/>
+        <a:font script="Bopo" typeface="Microsoft JhengHei"/>
+        <a:font script="Java" typeface="Javanese Text"/>
+        <a:font script="Lisu" typeface="Segoe UI"/>
+        <a:font script="Mymr" typeface="Myanmar Text"/>
+        <a:font script="Nkoo" typeface="Ebrima"/>
+        <a:font script="Olck" typeface="Nirmala UI"/>
+        <a:font script="Osma" typeface="Ebrima"/>
+        <a:font script="Phag" typeface="Phagspa"/>
+        <a:font script="Syrn" typeface="Estrangelo Edessa"/>
+        <a:font script="Syrj" typeface="Estrangelo Edessa"/>
+        <a:font script="Syre" typeface="Estrangelo Edessa"/>
+        <a:font script="Sora" typeface="Nirmala UI"/>
+        <a:font script="Tale" typeface="Microsoft Tai Le"/>
+        <a:font script="Talu" typeface="Microsoft New Tai Lue"/>
+        <a:font script="Tfng" typeface="Ebrima"/>
+      </a:majorFont>
+      <a:minorFont>
+        <a:latin typeface="Aptos" panose="02110004020202020204"/>
+        <a:ea typeface=""/>
+        <a:cs typeface=""/>
+        <a:font script="Jpan" typeface="游ゴシック"/>
+        <a:font script="Hang" typeface="맑은 고딕"/>
+        <a:font script="Hans" typeface="等线"/>
+        <a:font script="Hant" typeface="新細明體"/>
+        <a:font script="Arab" typeface="Arial"/>
+        <a:font script="Hebr" typeface="Arial"/>
+        <a:font script="Thai" typeface="Cordia New"/>
+        <a:font script="Ethi" typeface="Nyala"/>
+        <a:font script="Beng" typeface="Vrinda"/>
+        <a:font script="Gujr" typeface="Shruti"/>
+        <a:font script="Khmr" typeface="DaunPenh"/>
+        <a:font script="Knda" typeface="Tunga"/>
+        <a:font script="Guru" typeface="Raavi"/>
+        <a:font script="Cans" typeface="Euphemia"/>
+        <a:font script="Cher" typeface="Plantagenet Cherokee"/>
+        <a:font script="Yiii" typeface="Microsoft Yi Baiti"/>
+        <a:font script="Tibt" typeface="Microsoft Himalaya"/>
+        <a:font script="Thaa" typeface="MV Boli"/>
+        <a:font script="Deva" typeface="Mangal"/>
+        <a:font script="Telu" typeface="Gautami"/>
+        <a:font script="Taml" typeface="Latha"/>
+        <a:font script="Syrc" typeface="Estrangelo Edessa"/>
+        <a:font script="Orya" typeface="Kalinga"/>
+        <a:font script="Mlym" typeface="Kartika"/>
+        <a:font script="Laoo" typeface="DokChampa"/>
+        <a:font script="Sinh" typeface="Iskoola Pota"/>
+        <a:font script="Mong" typeface="Mongolian Baiti"/>
+        <a:font script="Viet" typeface="Arial"/>
+        <a:font script="Uigh" typeface="Microsoft Uighur"/>
+        <a:font script="Geor" typeface="Sylfaen"/>
+        <a:font script="Armn" typeface="Arial"/>
+        <a:font script="Bugi" typeface="Leelawadee UI"/>
+        <a:font script="Bopo" typeface="Microsoft JhengHei"/>
+        <a:font script="Java" typeface="Javanese Text"/>
+        <a:font script="Lisu" typeface="Segoe UI"/>
+        <a:font script="Mymr" typeface="Myanmar Text"/>
+        <a:font script="Nkoo" typeface="Ebrima"/>
+        <a:font script="Olck" typeface="Nirmala UI"/>
+        <a:font script="Osma" typeface="Ebrima"/>
+        <a:font script="Phag" typeface="Phagspa"/>
+        <a:font script="Syrn" typeface="Estrangelo Edessa"/>
+        <a:font script="Syrj" typeface="Estrangelo Edessa"/>
+        <a:font script="Syre" typeface="Estrangelo Edessa"/>
+        <a:font script="Sora" typeface="Nirmala UI"/>
+        <a:font script="Tale" typeface="Microsoft Tai Le"/>
+        <a:font script="Talu" typeface="Microsoft New Tai Lue"/>
+        <a:font script="Tfng" typeface="Ebrima"/>
+      </a:minorFont>
+    </a:fontScheme>
+    <a:fmtScheme name="Office">
+      <a:fillStyleLst>
+        <a:solidFill>
+          <a:schemeClr val="phClr"/>
+        </a:solidFill>
+        <a:gradFill rotWithShape="1">
+          <a:gsLst>
+            <a:gs pos="0">
+              <a:schemeClr val="phClr">
+                <a:lumMod val="110000"/>
+                <a:satMod val="105000"/>
+                <a:tint val="67000"/>
+              </a:schemeClr>
+            </a:gs>
+            <a:gs pos="50000">
+              <a:schemeClr val="phClr">
+                <a:lumMod val="105000"/>
+                <a:satMod val="103000"/>
+                <a:tint val="73000"/>
+              </a:schemeClr>
+            </a:gs>
+            <a:gs pos="100000">
+              <a:schemeClr val="phClr">
+                <a:lumMod val="105000"/>
+                <a:satMod val="109000"/>
+                <a:tint val="81000"/>
+              </a:schemeClr>
+            </a:gs>
+          </a:gsLst>
+          <a:lin ang="5400000" scaled="0"/>
+        </a:gradFill>
+        <a:gradFill rotWithShape="1">
+          <a:gsLst>
+            <a:gs pos="0">
+              <a:schemeClr val="phClr">
+                <a:satMod val="103000"/>
+                <a:lumMod val="102000"/>
+                <a:tint val="94000"/>
+              </a:schemeClr>
+            </a:gs>
+            <a:gs pos="50000">
+              <a:schemeClr val="phClr">
+                <a:satMod val="110000"/>
+                <a:lumMod val="100000"/>
+                <a:shade val="100000"/>
+              </a:schemeClr>
+            </a:gs>
+            <a:gs pos="100000">
+              <a:schemeClr val="phClr">
+                <a:lumMod val="99000"/>
+                <a:satMod val="120000"/>
+                <a:shade val="78000"/>
+              </a:schemeClr>
+            </a:gs>
+          </a:gsLst>
+          <a:lin ang="5400000" scaled="0"/>
+        </a:gradFill>
+      </a:fillStyleLst>
+      <a:lnStyleLst>
+        <a:ln w="12700" cap="flat" cmpd="sng" algn="ctr">
+          <a:solidFill>
+            <a:schemeClr val="phClr"/>
+          </a:solidFill>
+          <a:prstDash val="solid"/>
+          <a:miter lim="800000"/>
+        </a:ln>
+        <a:ln w="19050" cap="flat" cmpd="sng" algn="ctr">
+          <a:solidFill>
+            <a:schemeClr val="phClr"/>
+          </a:solidFill>
+          <a:prstDash val="solid"/>
+          <a:miter lim="800000"/>
+        </a:ln>
+        <a:ln w="25400" cap="flat" cmpd="sng" algn="ctr">
+          <a:solidFill>
+            <a:schemeClr val="phClr"/>
+          </a:solidFill>
+          <a:prstDash val="solid"/>
+          <a:miter lim="800000"/>
+        </a:ln>
+      </a:lnStyleLst>
+      <a:effectStyleLst>
+        <a:effectStyle>
+          <a:effectLst/>
+        </a:effectStyle>
+        <a:effectStyle>
+          <a:effectLst/>
+        </a:effectStyle>
+        <a:effectStyle>
+          <a:effectLst>
+            <a:outerShdw blurRad="57150" dist="19050" dir="5400000" algn="ctr" rotWithShape="0">
+              <a:srgbClr val="000000">
+                <a:alpha val="63000"/>
+              </a:srgbClr>
+            </a:outerShdw>
+          </a:effectLst>
+        </a:effectStyle>
+      </a:effectStyleLst>
+      <a:bgFillStyleLst>
+        <a:solidFill>
+          <a:schemeClr val="phClr"/>
+        </a:solidFill>
+        <a:solidFill>
+          <a:schemeClr val="phClr">
+            <a:tint val="95000"/>
+            <a:satMod val="170000"/>
+          </a:schemeClr>
+        </a:solidFill>
+        <a:gradFill rotWithShape="1">
+          <a:gsLst>
+            <a:gs pos="0">
+              <a:schemeClr val="phClr">
+                <a:tint val="93000"/>
+                <a:satMod val="150000"/>
+                <a:shade val="98000"/>
+                <a:lumMod val="102000"/>
+              </a:schemeClr>
+            </a:gs>
+            <a:gs pos="50000">
+              <a:schemeClr val="phClr">
+                <a:tint val="98000"/>
+                <a:satMod val="130000"/>
+                <a:shade val="90000"/>
+                <a:lumMod val="103000"/>
+              </a:schemeClr>
+            </a:gs>
+            <a:gs pos="100000">
+              <a:schemeClr val="phClr">
+                <a:shade val="63000"/>
+                <a:satMod val="120000"/>
+              </a:schemeClr>
+            </a:gs>
+          </a:gsLst>
+          <a:lin ang="5400000" scaled="0"/>
+        </a:gradFill>
+      </a:bgFillStyleLst>
+    </a:fmtScheme>
+  </a:themeElements>
+  <a:objectDefaults>
+    <a:lnDef>
+      <a:spPr/>
+      <a:bodyPr/>
+      <a:lstStyle/>
+      <a:style>
+        <a:lnRef idx="2">
+          <a:schemeClr val="accent1"/>
+        </a:lnRef>
+        <a:fillRef idx="0">
+          <a:schemeClr val="accent1"/>
+        </a:fillRef>
+        <a:effectRef idx="1">
+          <a:schemeClr val="accent1"/>
+        </a:effectRef>
+        <a:fontRef idx="minor">
+          <a:schemeClr val="tx1"/>
+        </a:fontRef>
+      </a:style>
+    </a:lnDef>
+  </a:objectDefaults>
+  <a:extraClrSchemeLst/>
+  <a:extLst>
+    <a:ext uri="{05A4C25C-085E-4340-85A3-A5531E510DB2}">
+      <thm15:themeFamily xmlns:thm15="http://schemas.microsoft.com/office/thememl/2012/main" name="Office Theme" id="{2E142A2C-CD16-42D6-873A-C26D2A0506FA}" vid="{1BDDFF52-6CD6-40A5-AB3C-68EB2F1E4D0A}"/>
+    </a:ext>
+  </a:extLst>
+</a:theme>
 </file>